--- a/assets/figures-editable/c1-c2/c1-e02.pptx
+++ b/assets/figures-editable/c1-c2/c1-e02.pptx
@@ -7,7 +7,7 @@
   <p:sldIdLst>
     <p:sldId id="256" r:id="rId7"/>
   </p:sldIdLst>
-  <p:sldSz cx="11948160" cy="7924799" type="screen4x3"/>
+  <p:sldSz cx="12191695" cy="6858000" type="screen4x3"/>
   <p:notesSz cx="6858000" cy="9144000"/>
   <p:defaultTextStyle>
     <a:defPPr>
@@ -3098,14 +3098,14 @@
       <p:grpSpPr/>
       <p:sp>
         <p:nvSpPr>
-          <p:cNvPr id="2" name="text1" descr="sci-ppt:C1-E02-001"/>
+          <p:cNvPr id="2" name="C1-E02 text 0" descr="sci-ppt:o000"/>
           <p:cNvSpPr txBox="1"/>
           <p:nvPr/>
         </p:nvSpPr>
         <p:spPr>
           <a:xfrm>
-            <a:off x="316992" y="268224"/>
-            <a:ext cx="11277600" cy="359054"/>
+            <a:off x="274320" y="118872"/>
+            <a:ext cx="11612880" cy="340105"/>
           </a:xfrm>
           <a:prstGeom prst="rect">
             <a:avLst/>
@@ -3114,7 +3114,7 @@
           <a:effectLst/>
         </p:spPr>
         <p:txBody>
-          <a:bodyPr wrap="none" lIns="27432" rIns="27432" tIns="18288" bIns="18288" anchor="ctr">
+          <a:bodyPr wrap="none" lIns="18288" rIns="18288" tIns="18288" bIns="18288" anchor="t">
             <a:spAutoFit/>
           </a:bodyPr>
           <a:lstStyle/>
@@ -3125,37 +3125,229 @@
               </a:spcAft>
             </a:pPr>
             <a:r>
-              <a:rPr sz="1823" b="0" i="0">
+              <a:rPr sz="1900" b="1" i="0">
                 <a:solidFill>
                   <a:srgbClr val="8EDBD4"/>
                 </a:solidFill>
                 <a:latin typeface="Arial"/>
               </a:rPr>
-              <a:t>C1-E02 | Physical-variable diagram</a:t>
-            </a:r>
-          </a:p>
-        </p:txBody>
-      </p:sp>
-      <p:sp>
-        <p:nvSpPr>
-          <p:cNvPr id="3" name="ellipse2" descr="sci-ppt:C1-E02-002"/>
+              <a:t>C1-E02 · Exact continuity within the spherical model</a:t>
+            </a:r>
+          </a:p>
+        </p:txBody>
+      </p:sp>
+      <p:sp>
+        <p:nvSpPr>
+          <p:cNvPr id="3" name="C1-E02 round_rect 1" descr="sci-ppt:o001"/>
           <p:cNvSpPr/>
           <p:nvPr/>
         </p:nvSpPr>
         <p:spPr>
           <a:xfrm>
-            <a:off x="2072640" y="1402080"/>
-            <a:ext cx="2438400" cy="2438400"/>
+            <a:off x="365760" y="914400"/>
+            <a:ext cx="4297680" cy="4846320"/>
+          </a:xfrm>
+          <a:prstGeom prst="roundRect">
+            <a:avLst/>
+          </a:prstGeom>
+          <a:solidFill>
+            <a:srgbClr val="1E4A5A"/>
+          </a:solidFill>
+          <a:ln w="19050">
+            <a:solidFill>
+              <a:srgbClr val="2B6678"/>
+            </a:solidFill>
+          </a:ln>
+          <a:effectLst/>
+        </p:spPr>
+        <p:txBody>
+          <a:bodyPr rtlCol="0" anchor="ctr"/>
+          <a:lstStyle/>
+          <a:p>
+            <a:pPr algn="ctr"/>
+          </a:p>
+        </p:txBody>
+      </p:sp>
+      <p:sp>
+        <p:nvSpPr>
+          <p:cNvPr id="4" name="C1-E02 text 2" descr="sci-ppt:o002"/>
+          <p:cNvSpPr txBox="1"/>
+          <p:nvPr/>
+        </p:nvSpPr>
+        <p:spPr>
+          <a:xfrm>
+            <a:off x="502920" y="978408"/>
+            <a:ext cx="4023360" cy="262636"/>
+          </a:xfrm>
+          <a:prstGeom prst="rect">
+            <a:avLst/>
+          </a:prstGeom>
+          <a:noFill/>
+          <a:effectLst/>
+        </p:spPr>
+        <p:txBody>
+          <a:bodyPr wrap="none" lIns="18288" rIns="18288" tIns="18288" bIns="18288" anchor="t">
+            <a:spAutoFit/>
+          </a:bodyPr>
+          <a:lstStyle/>
+          <a:p>
+            <a:pPr algn="l">
+              <a:spcAft>
+                <a:spcPts val="0"/>
+              </a:spcAft>
+            </a:pPr>
+            <a:r>
+              <a:rPr sz="1400" b="1" i="0">
+                <a:solidFill>
+                  <a:srgbClr val="8EDBD4"/>
+                </a:solidFill>
+                <a:latin typeface="Arial"/>
+              </a:rPr>
+              <a:t>Concentric shells carry one flux</a:t>
+            </a:r>
+          </a:p>
+        </p:txBody>
+      </p:sp>
+      <p:sp>
+        <p:nvSpPr>
+          <p:cNvPr id="5" name="C1-E02 ellipse 3" descr="sci-ppt:o003"/>
+          <p:cNvSpPr/>
+          <p:nvPr/>
+        </p:nvSpPr>
+        <p:spPr>
+          <a:xfrm>
+            <a:off x="1920240" y="2697480"/>
+            <a:ext cx="1188720" cy="1188720"/>
+          </a:xfrm>
+          <a:prstGeom prst="ellipse">
+            <a:avLst/>
+          </a:prstGeom>
+          <a:noFill/>
+          <a:ln w="25400">
+            <a:solidFill>
+              <a:srgbClr val="F2B880"/>
+            </a:solidFill>
+          </a:ln>
+          <a:effectLst/>
+        </p:spPr>
+        <p:txBody>
+          <a:bodyPr rtlCol="0" anchor="ctr"/>
+          <a:lstStyle/>
+          <a:p>
+            <a:pPr algn="ctr"/>
+          </a:p>
+        </p:txBody>
+      </p:sp>
+      <p:sp>
+        <p:nvSpPr>
+          <p:cNvPr id="6" name="C1-E02 ellipse 4" descr="sci-ppt:o004"/>
+          <p:cNvSpPr/>
+          <p:nvPr/>
+        </p:nvSpPr>
+        <p:spPr>
+          <a:xfrm>
+            <a:off x="1563624" y="2340864"/>
+            <a:ext cx="1901952" cy="1901952"/>
+          </a:xfrm>
+          <a:prstGeom prst="ellipse">
+            <a:avLst/>
+          </a:prstGeom>
+          <a:noFill/>
+          <a:ln w="16510">
+            <a:solidFill>
+              <a:srgbClr val="2B6678"/>
+            </a:solidFill>
+          </a:ln>
+          <a:effectLst/>
+        </p:spPr>
+        <p:txBody>
+          <a:bodyPr rtlCol="0" anchor="ctr"/>
+          <a:lstStyle/>
+          <a:p>
+            <a:pPr algn="ctr"/>
+          </a:p>
+        </p:txBody>
+      </p:sp>
+      <p:sp>
+        <p:nvSpPr>
+          <p:cNvPr id="7" name="C1-E02 ellipse 5" descr="sci-ppt:o005"/>
+          <p:cNvSpPr/>
+          <p:nvPr/>
+        </p:nvSpPr>
+        <p:spPr>
+          <a:xfrm>
+            <a:off x="1147572" y="1924812"/>
+            <a:ext cx="2734056" cy="2734056"/>
+          </a:xfrm>
+          <a:prstGeom prst="ellipse">
+            <a:avLst/>
+          </a:prstGeom>
+          <a:noFill/>
+          <a:ln w="16510">
+            <a:solidFill>
+              <a:srgbClr val="2B6678"/>
+            </a:solidFill>
+          </a:ln>
+          <a:effectLst/>
+        </p:spPr>
+        <p:txBody>
+          <a:bodyPr rtlCol="0" anchor="ctr"/>
+          <a:lstStyle/>
+          <a:p>
+            <a:pPr algn="ctr"/>
+          </a:p>
+        </p:txBody>
+      </p:sp>
+      <p:sp>
+        <p:nvSpPr>
+          <p:cNvPr id="8" name="C1-E02 ellipse 6" descr="sci-ppt:o006"/>
+          <p:cNvSpPr/>
+          <p:nvPr/>
+        </p:nvSpPr>
+        <p:spPr>
+          <a:xfrm>
+            <a:off x="612647" y="1389888"/>
+            <a:ext cx="3803904" cy="3803904"/>
+          </a:xfrm>
+          <a:prstGeom prst="ellipse">
+            <a:avLst/>
+          </a:prstGeom>
+          <a:noFill/>
+          <a:ln w="16510">
+            <a:solidFill>
+              <a:srgbClr val="2B6678"/>
+            </a:solidFill>
+          </a:ln>
+          <a:effectLst/>
+        </p:spPr>
+        <p:txBody>
+          <a:bodyPr rtlCol="0" anchor="ctr"/>
+          <a:lstStyle/>
+          <a:p>
+            <a:pPr algn="ctr"/>
+          </a:p>
+        </p:txBody>
+      </p:sp>
+      <p:sp>
+        <p:nvSpPr>
+          <p:cNvPr id="9" name="C1-E02 ellipse 7" descr="sci-ppt:o007"/>
+          <p:cNvSpPr/>
+          <p:nvPr/>
+        </p:nvSpPr>
+        <p:spPr>
+          <a:xfrm>
+            <a:off x="1920240" y="2697480"/>
+            <a:ext cx="1188720" cy="1188720"/>
           </a:xfrm>
           <a:prstGeom prst="ellipse">
             <a:avLst/>
           </a:prstGeom>
           <a:solidFill>
-            <a:srgbClr val="213E4B"/>
+            <a:srgbClr val="0C1820"/>
           </a:solidFill>
-          <a:ln w="21590">
+          <a:ln w="27940">
             <a:solidFill>
-              <a:srgbClr val="B4C7D2"/>
+              <a:srgbClr val="F2B880"/>
             </a:solidFill>
           </a:ln>
           <a:effectLst/>
@@ -3170,19 +3362,19 @@
       </p:sp>
       <p:cxnSp>
         <p:nvCxnSpPr>
-          <p:cNvPr id="4" name="arrow3" descr="sci-ppt:C1-E02-003"/>
+          <p:cNvPr id="10" name="C1-E02 arrow 8" descr="sci-ppt:o008"/>
           <p:cNvCxnSpPr/>
           <p:nvPr/>
         </p:nvCxnSpPr>
         <p:spPr>
-          <a:xfrm>
-            <a:off x="3291840" y="2621280"/>
-            <a:ext cx="1219200" cy="0"/>
+          <a:xfrm flipV="1">
+            <a:off x="2617809" y="1923067"/>
+            <a:ext cx="138142" cy="783442"/>
           </a:xfrm>
           <a:prstGeom prst="line">
             <a:avLst/>
           </a:prstGeom>
-          <a:ln w="25400">
+          <a:ln w="33020">
             <a:solidFill>
               <a:srgbClr val="8EDBD4"/>
             </a:solidFill>
@@ -3194,14 +3386,14 @@
       </p:cxnSp>
       <p:sp>
         <p:nvSpPr>
-          <p:cNvPr id="5" name="text4" descr="sci-ppt:C1-E02-004"/>
+          <p:cNvPr id="11" name="C1-E02 text 9" descr="sci-ppt:o009"/>
           <p:cNvSpPr txBox="1"/>
           <p:nvPr/>
         </p:nvSpPr>
         <p:spPr>
           <a:xfrm>
-            <a:off x="3474720" y="2133600"/>
-            <a:ext cx="1584960" cy="396849"/>
+            <a:off x="2722934" y="1741298"/>
+            <a:ext cx="1005840" cy="223900"/>
           </a:xfrm>
           <a:prstGeom prst="rect">
             <a:avLst/>
@@ -3210,7 +3402,7 @@
           <a:effectLst/>
         </p:spPr>
         <p:txBody>
-          <a:bodyPr wrap="none" lIns="27432" rIns="27432" tIns="18288" bIns="18288" anchor="ctr">
+          <a:bodyPr wrap="none" lIns="18288" rIns="18288" tIns="18288" bIns="18288" anchor="t">
             <a:spAutoFit/>
           </a:bodyPr>
           <a:lstStyle/>
@@ -3221,152 +3413,32 @@
               </a:spcAft>
             </a:pPr>
             <a:r>
-              <a:rPr sz="2016" b="0" i="0">
+              <a:rPr sz="1150" b="0" i="0">
                 <a:solidFill>
                   <a:srgbClr val="E7F0F3"/>
                 </a:solidFill>
                 <a:latin typeface="Arial"/>
               </a:rPr>
-              <a:t>R(t)</a:t>
-            </a:r>
-          </a:p>
-        </p:txBody>
-      </p:sp>
-      <p:sp>
-        <p:nvSpPr>
-          <p:cNvPr id="6" name="text5" descr="sci-ppt:C1-E02-005"/>
-          <p:cNvSpPr txBox="1"/>
-          <p:nvPr/>
-        </p:nvSpPr>
-        <p:spPr>
-          <a:xfrm>
-            <a:off x="2682240" y="2804160"/>
-            <a:ext cx="2194560" cy="377952"/>
-          </a:xfrm>
-          <a:prstGeom prst="rect">
-            <a:avLst/>
-          </a:prstGeom>
-          <a:noFill/>
-          <a:effectLst/>
-        </p:spPr>
-        <p:txBody>
-          <a:bodyPr wrap="none" lIns="27432" rIns="27432" tIns="18288" bIns="18288" anchor="ctr">
-            <a:spAutoFit/>
-          </a:bodyPr>
-          <a:lstStyle/>
-          <a:p>
-            <a:pPr algn="l">
-              <a:spcAft>
-                <a:spcPts val="0"/>
-              </a:spcAft>
-            </a:pPr>
-            <a:r>
-              <a:rPr sz="1920" b="0" i="0">
-                <a:solidFill>
-                  <a:srgbClr val="E7F0F3"/>
-                </a:solidFill>
-                <a:latin typeface="Arial"/>
-              </a:rPr>
-              <a:t>p_b</a:t>
-            </a:r>
-          </a:p>
-        </p:txBody>
-      </p:sp>
-      <p:sp>
-        <p:nvSpPr>
-          <p:cNvPr id="7" name="text6" descr="sci-ppt:C1-E02-006"/>
-          <p:cNvSpPr txBox="1"/>
-          <p:nvPr/>
-        </p:nvSpPr>
-        <p:spPr>
-          <a:xfrm>
-            <a:off x="5242560" y="1524000"/>
-            <a:ext cx="4876800" cy="415747"/>
-          </a:xfrm>
-          <a:prstGeom prst="rect">
-            <a:avLst/>
-          </a:prstGeom>
-          <a:noFill/>
-          <a:effectLst/>
-        </p:spPr>
-        <p:txBody>
-          <a:bodyPr wrap="none" lIns="27432" rIns="27432" tIns="18288" bIns="18288" anchor="ctr">
-            <a:spAutoFit/>
-          </a:bodyPr>
-          <a:lstStyle/>
-          <a:p>
-            <a:pPr algn="l">
-              <a:spcAft>
-                <a:spcPts val="0"/>
-              </a:spcAft>
-            </a:pPr>
-            <a:r>
-              <a:rPr sz="2111" b="0" i="0">
-                <a:solidFill>
-                  <a:srgbClr val="E7F0F3"/>
-                </a:solidFill>
-                <a:latin typeface="Arial"/>
-              </a:rPr>
-              <a:t>Surrounding liquid</a:t>
-            </a:r>
-          </a:p>
-        </p:txBody>
-      </p:sp>
-      <p:sp>
-        <p:nvSpPr>
-          <p:cNvPr id="8" name="text7" descr="sci-ppt:C1-E02-007"/>
-          <p:cNvSpPr txBox="1"/>
-          <p:nvPr/>
-        </p:nvSpPr>
-        <p:spPr>
-          <a:xfrm>
-            <a:off x="5242560" y="1987296"/>
-            <a:ext cx="5852160" cy="359054"/>
-          </a:xfrm>
-          <a:prstGeom prst="rect">
-            <a:avLst/>
-          </a:prstGeom>
-          <a:noFill/>
-          <a:effectLst/>
-        </p:spPr>
-        <p:txBody>
-          <a:bodyPr wrap="none" lIns="27432" rIns="27432" tIns="18288" bIns="18288" anchor="ctr">
-            <a:spAutoFit/>
-          </a:bodyPr>
-          <a:lstStyle/>
-          <a:p>
-            <a:pPr algn="l">
-              <a:spcAft>
-                <a:spcPts val="0"/>
-              </a:spcAft>
-            </a:pPr>
-            <a:r>
-              <a:rPr sz="1823" b="0" i="0">
-                <a:solidFill>
-                  <a:srgbClr val="E7F0F3"/>
-                </a:solidFill>
-                <a:latin typeface="Arial"/>
-              </a:rPr>
-              <a:t>p∞, ρ, μ; interface: σ</a:t>
+              <a:t>1.00 Ṙ</a:t>
             </a:r>
           </a:p>
         </p:txBody>
       </p:sp>
       <p:cxnSp>
         <p:nvCxnSpPr>
-          <p:cNvPr id="9" name="arrow8" descr="sci-ppt:C1-E02-008"/>
+          <p:cNvPr id="12" name="C1-E02 arrow 10" descr="sci-ppt:o010"/>
           <p:cNvCxnSpPr/>
           <p:nvPr/>
         </p:nvCxnSpPr>
         <p:spPr>
-          <a:xfrm>
-            <a:off x="3291840" y="2621280"/>
-            <a:ext cx="1706880" cy="1158240"/>
+          <a:xfrm flipV="1">
+            <a:off x="3060057" y="2203518"/>
+            <a:ext cx="216593" cy="309328"/>
           </a:xfrm>
           <a:prstGeom prst="line">
             <a:avLst/>
           </a:prstGeom>
-          <a:ln w="25400">
+          <a:ln w="33020">
             <a:solidFill>
               <a:srgbClr val="8EDBD4"/>
             </a:solidFill>
@@ -3378,14 +3450,14 @@
       </p:cxnSp>
       <p:sp>
         <p:nvSpPr>
-          <p:cNvPr id="10" name="text9" descr="sci-ppt:C1-E02-009"/>
+          <p:cNvPr id="13" name="C1-E02 text 11" descr="sci-ppt:o011"/>
           <p:cNvSpPr txBox="1"/>
           <p:nvPr/>
         </p:nvSpPr>
         <p:spPr>
           <a:xfrm>
-            <a:off x="5364480" y="3657600"/>
-            <a:ext cx="1950720" cy="340156"/>
+            <a:off x="3272888" y="2033868"/>
+            <a:ext cx="1005840" cy="223900"/>
           </a:xfrm>
           <a:prstGeom prst="rect">
             <a:avLst/>
@@ -3394,7 +3466,7 @@
           <a:effectLst/>
         </p:spPr>
         <p:txBody>
-          <a:bodyPr wrap="none" lIns="27432" rIns="27432" tIns="18288" bIns="18288" anchor="ctr">
+          <a:bodyPr wrap="none" lIns="18288" rIns="18288" tIns="18288" bIns="18288" anchor="t">
             <a:spAutoFit/>
           </a:bodyPr>
           <a:lstStyle/>
@@ -3405,32 +3477,32 @@
               </a:spcAft>
             </a:pPr>
             <a:r>
-              <a:rPr sz="1728" b="0" i="0">
+              <a:rPr sz="1150" b="0" i="0">
                 <a:solidFill>
                   <a:srgbClr val="E7F0F3"/>
                 </a:solidFill>
                 <a:latin typeface="Arial"/>
               </a:rPr>
-              <a:t>r ≥ R</a:t>
+              <a:t>0.39 Ṙ</a:t>
             </a:r>
           </a:p>
         </p:txBody>
       </p:sp>
       <p:cxnSp>
         <p:nvCxnSpPr>
-          <p:cNvPr id="11" name="arrow10" descr="sci-ppt:C1-E02-010"/>
+          <p:cNvPr id="14" name="C1-E02 arrow 12" descr="sci-ppt:o012"/>
           <p:cNvCxnSpPr/>
           <p:nvPr/>
         </p:nvCxnSpPr>
         <p:spPr>
-          <a:xfrm>
-            <a:off x="4998720" y="2621280"/>
-            <a:ext cx="792480" cy="0"/>
+          <a:xfrm flipV="1">
+            <a:off x="3698480" y="2488641"/>
+            <a:ext cx="207300" cy="119685"/>
           </a:xfrm>
           <a:prstGeom prst="line">
             <a:avLst/>
           </a:prstGeom>
-          <a:ln w="25400">
+          <a:ln w="33020">
             <a:solidFill>
               <a:srgbClr val="8EDBD4"/>
             </a:solidFill>
@@ -3442,14 +3514,14 @@
       </p:cxnSp>
       <p:sp>
         <p:nvSpPr>
-          <p:cNvPr id="12" name="text11" descr="sci-ppt:C1-E02-011"/>
+          <p:cNvPr id="15" name="C1-E02 text 13" descr="sci-ppt:o013"/>
           <p:cNvSpPr txBox="1"/>
           <p:nvPr/>
         </p:nvSpPr>
         <p:spPr>
           <a:xfrm>
-            <a:off x="5059680" y="2865120"/>
-            <a:ext cx="3291840" cy="321259"/>
+            <a:off x="3923411" y="2342337"/>
+            <a:ext cx="1005840" cy="223900"/>
           </a:xfrm>
           <a:prstGeom prst="rect">
             <a:avLst/>
@@ -3458,7 +3530,7 @@
           <a:effectLst/>
         </p:spPr>
         <p:txBody>
-          <a:bodyPr wrap="none" lIns="27432" rIns="27432" tIns="18288" bIns="18288" anchor="ctr">
+          <a:bodyPr wrap="none" lIns="18288" rIns="18288" tIns="18288" bIns="18288" anchor="t">
             <a:spAutoFit/>
           </a:bodyPr>
           <a:lstStyle/>
@@ -3469,27 +3541,51 @@
               </a:spcAft>
             </a:pPr>
             <a:r>
-              <a:rPr sz="1632" b="0" i="0">
+              <a:rPr sz="1150" b="0" i="0">
                 <a:solidFill>
                   <a:srgbClr val="E7F0F3"/>
                 </a:solidFill>
                 <a:latin typeface="Arial"/>
               </a:rPr>
-              <a:t>+e_r (coordinate)</a:t>
-            </a:r>
-          </a:p>
-        </p:txBody>
-      </p:sp>
-      <p:sp>
-        <p:nvSpPr>
-          <p:cNvPr id="13" name="text12" descr="sci-ppt:C1-E02-012"/>
+              <a:t>0.19 Ṙ</a:t>
+            </a:r>
+          </a:p>
+        </p:txBody>
+      </p:sp>
+      <p:cxnSp>
+        <p:nvCxnSpPr>
+          <p:cNvPr id="16" name="C1-E02 arrow 14" descr="sci-ppt:o014"/>
+          <p:cNvCxnSpPr/>
+          <p:nvPr/>
+        </p:nvCxnSpPr>
+        <p:spPr>
+          <a:xfrm flipV="1">
+            <a:off x="4409314" y="3110673"/>
+            <a:ext cx="176028" cy="15400"/>
+          </a:xfrm>
+          <a:prstGeom prst="line">
+            <a:avLst/>
+          </a:prstGeom>
+          <a:ln w="33020">
+            <a:solidFill>
+              <a:srgbClr val="8EDBD4"/>
+            </a:solidFill>
+            <a:headEnd type="none" w="med" len="med"/>
+            <a:tailEnd type="triangle" w="med" len="med"/>
+          </a:ln>
+          <a:effectLst/>
+        </p:spPr>
+      </p:cxnSp>
+      <p:sp>
+        <p:nvSpPr>
+          <p:cNvPr id="17" name="C1-E02 text 15" descr="sci-ppt:o015"/>
           <p:cNvSpPr txBox="1"/>
           <p:nvPr/>
         </p:nvSpPr>
         <p:spPr>
           <a:xfrm>
-            <a:off x="1219200" y="4572000"/>
-            <a:ext cx="9753600" cy="340156"/>
+            <a:off x="4612496" y="2994569"/>
+            <a:ext cx="1005840" cy="223900"/>
           </a:xfrm>
           <a:prstGeom prst="rect">
             <a:avLst/>
@@ -3498,7 +3594,7 @@
           <a:effectLst/>
         </p:spPr>
         <p:txBody>
-          <a:bodyPr wrap="none" lIns="27432" rIns="27432" tIns="18288" bIns="18288" anchor="ctr">
+          <a:bodyPr wrap="none" lIns="18288" rIns="18288" tIns="18288" bIns="18288" anchor="t">
             <a:spAutoFit/>
           </a:bodyPr>
           <a:lstStyle/>
@@ -3509,57 +3605,171 @@
               </a:spcAft>
             </a:pPr>
             <a:r>
-              <a:rPr sz="1728" b="0" i="0">
+              <a:rPr sz="1150" b="0" i="0">
                 <a:solidFill>
                   <a:srgbClr val="E7F0F3"/>
                 </a:solidFill>
                 <a:latin typeface="Arial"/>
               </a:rPr>
-              <a:t>Signed wall speed: Ṙ; acceleration: R̈</a:t>
-            </a:r>
-          </a:p>
-        </p:txBody>
-      </p:sp>
-      <p:sp>
-        <p:nvSpPr>
-          <p:cNvPr id="14" name="ellipse13" descr="sci-ppt:C1-E02-013"/>
-          <p:cNvSpPr/>
+              <a:t>0.10 Ṙ</a:t>
+            </a:r>
+          </a:p>
+        </p:txBody>
+      </p:sp>
+      <p:sp>
+        <p:nvSpPr>
+          <p:cNvPr id="18" name="C1-E02 text 16" descr="sci-ppt:o016"/>
+          <p:cNvSpPr txBox="1"/>
           <p:nvPr/>
         </p:nvSpPr>
         <p:spPr>
           <a:xfrm>
-            <a:off x="1463040" y="792480"/>
-            <a:ext cx="3657600" cy="3657600"/>
-          </a:xfrm>
-          <a:prstGeom prst="ellipse">
+            <a:off x="502920" y="5074920"/>
+            <a:ext cx="4023360" cy="433070"/>
+          </a:xfrm>
+          <a:prstGeom prst="rect">
             <a:avLst/>
           </a:prstGeom>
           <a:noFill/>
-          <a:ln w="21590">
+          <a:effectLst/>
+        </p:spPr>
+        <p:txBody>
+          <a:bodyPr wrap="none" lIns="18288" rIns="18288" tIns="18288" bIns="18288" anchor="t">
+            <a:spAutoFit/>
+          </a:bodyPr>
+          <a:lstStyle/>
+          <a:p>
+            <a:pPr algn="l">
+              <a:spcAft>
+                <a:spcPts val="0"/>
+              </a:spcAft>
+            </a:pPr>
+            <a:r>
+              <a:rPr sz="1250" b="0" i="0">
+                <a:solidFill>
+                  <a:srgbClr val="E7F0F3"/>
+                </a:solidFill>
+                <a:latin typeface="Arial"/>
+              </a:rPr>
+              <a:t>Shell area grows as r², so the radial speed</a:t>
+            </a:r>
+          </a:p>
+          <a:p>
+            <a:pPr algn="l">
+              <a:spcAft>
+                <a:spcPts val="0"/>
+              </a:spcAft>
+            </a:pPr>
+            <a:r>
+              <a:rPr sz="1250" b="0" i="0">
+                <a:solidFill>
+                  <a:srgbClr val="E7F0F3"/>
+                </a:solidFill>
+                <a:latin typeface="Arial"/>
+              </a:rPr>
+              <a:t>falls as 1/r². Arrow length = speed.</a:t>
+            </a:r>
+          </a:p>
+        </p:txBody>
+      </p:sp>
+      <p:cxnSp>
+        <p:nvCxnSpPr>
+          <p:cNvPr id="19" name="C1-E02 line 17" descr="sci-ppt:o017"/>
+          <p:cNvCxnSpPr/>
+          <p:nvPr/>
+        </p:nvCxnSpPr>
+        <p:spPr>
+          <a:xfrm>
+            <a:off x="5577840" y="5303520"/>
+            <a:ext cx="5852160" cy="0"/>
+          </a:xfrm>
+          <a:prstGeom prst="line">
+            <a:avLst/>
+          </a:prstGeom>
+          <a:ln w="19050">
             <a:solidFill>
               <a:srgbClr val="B4C7D2"/>
             </a:solidFill>
           </a:ln>
           <a:effectLst/>
         </p:spPr>
-        <p:txBody>
-          <a:bodyPr rtlCol="0" anchor="ctr"/>
-          <a:lstStyle/>
-          <a:p>
-            <a:pPr algn="ctr"/>
-          </a:p>
-        </p:txBody>
-      </p:sp>
-      <p:sp>
-        <p:nvSpPr>
-          <p:cNvPr id="15" name="text14" descr="sci-ppt:C1-E02-014"/>
+      </p:cxnSp>
+      <p:cxnSp>
+        <p:nvCxnSpPr>
+          <p:cNvPr id="20" name="C1-E02 line 18" descr="sci-ppt:o018"/>
+          <p:cNvCxnSpPr/>
+          <p:nvPr/>
+        </p:nvCxnSpPr>
+        <p:spPr>
+          <a:xfrm>
+            <a:off x="5577840" y="1371600"/>
+            <a:ext cx="0" cy="3931920"/>
+          </a:xfrm>
+          <a:prstGeom prst="line">
+            <a:avLst/>
+          </a:prstGeom>
+          <a:ln w="19050">
+            <a:solidFill>
+              <a:srgbClr val="B4C7D2"/>
+            </a:solidFill>
+          </a:ln>
+          <a:effectLst/>
+        </p:spPr>
+      </p:cxnSp>
+      <p:cxnSp>
+        <p:nvCxnSpPr>
+          <p:cNvPr id="21" name="C1-E02 line 19" descr="sci-ppt:o019"/>
+          <p:cNvCxnSpPr/>
+          <p:nvPr/>
+        </p:nvCxnSpPr>
+        <p:spPr>
+          <a:xfrm>
+            <a:off x="5577840" y="5303520"/>
+            <a:ext cx="0" cy="64008"/>
+          </a:xfrm>
+          <a:prstGeom prst="line">
+            <a:avLst/>
+          </a:prstGeom>
+          <a:ln w="12700">
+            <a:solidFill>
+              <a:srgbClr val="B4C7D2"/>
+            </a:solidFill>
+          </a:ln>
+          <a:effectLst/>
+        </p:spPr>
+      </p:cxnSp>
+      <p:cxnSp>
+        <p:nvCxnSpPr>
+          <p:cNvPr id="22" name="C1-E02 line 20" descr="sci-ppt:o020"/>
+          <p:cNvCxnSpPr/>
+          <p:nvPr/>
+        </p:nvCxnSpPr>
+        <p:spPr>
+          <a:xfrm>
+            <a:off x="5577840" y="1371600"/>
+            <a:ext cx="0" cy="3931920"/>
+          </a:xfrm>
+          <a:prstGeom prst="line">
+            <a:avLst/>
+          </a:prstGeom>
+          <a:ln w="7620">
+            <a:solidFill>
+              <a:srgbClr val="2E4756"/>
+            </a:solidFill>
+          </a:ln>
+          <a:effectLst/>
+        </p:spPr>
+      </p:cxnSp>
+      <p:sp>
+        <p:nvSpPr>
+          <p:cNvPr id="23" name="C1-E02 text 21" descr="sci-ppt:o021"/>
           <p:cNvSpPr txBox="1"/>
           <p:nvPr/>
         </p:nvSpPr>
         <p:spPr>
           <a:xfrm>
-            <a:off x="5852160" y="3230880"/>
-            <a:ext cx="4876800" cy="377952"/>
+            <a:off x="5120640" y="5385816"/>
+            <a:ext cx="914400" cy="208407"/>
           </a:xfrm>
           <a:prstGeom prst="rect">
             <a:avLst/>
@@ -3568,7 +3778,697 @@
           <a:effectLst/>
         </p:spPr>
         <p:txBody>
-          <a:bodyPr wrap="none" lIns="27432" rIns="27432" tIns="18288" bIns="18288" anchor="ctr">
+          <a:bodyPr wrap="none" lIns="18288" rIns="18288" tIns="18288" bIns="18288" anchor="t">
+            <a:spAutoFit/>
+          </a:bodyPr>
+          <a:lstStyle/>
+          <a:p>
+            <a:pPr algn="ctr">
+              <a:spcAft>
+                <a:spcPts val="0"/>
+              </a:spcAft>
+            </a:pPr>
+            <a:r>
+              <a:rPr sz="1050" b="0" i="0">
+                <a:solidFill>
+                  <a:srgbClr val="B4C7D2"/>
+                </a:solidFill>
+                <a:latin typeface="Arial"/>
+              </a:rPr>
+              <a:t>1</a:t>
+            </a:r>
+          </a:p>
+        </p:txBody>
+      </p:sp>
+      <p:cxnSp>
+        <p:nvCxnSpPr>
+          <p:cNvPr id="24" name="C1-E02 line 22" descr="sci-ppt:o022"/>
+          <p:cNvCxnSpPr/>
+          <p:nvPr/>
+        </p:nvCxnSpPr>
+        <p:spPr>
+          <a:xfrm>
+            <a:off x="7528559" y="5303520"/>
+            <a:ext cx="0" cy="64008"/>
+          </a:xfrm>
+          <a:prstGeom prst="line">
+            <a:avLst/>
+          </a:prstGeom>
+          <a:ln w="12700">
+            <a:solidFill>
+              <a:srgbClr val="B4C7D2"/>
+            </a:solidFill>
+          </a:ln>
+          <a:effectLst/>
+        </p:spPr>
+      </p:cxnSp>
+      <p:cxnSp>
+        <p:nvCxnSpPr>
+          <p:cNvPr id="25" name="C1-E02 line 23" descr="sci-ppt:o023"/>
+          <p:cNvCxnSpPr/>
+          <p:nvPr/>
+        </p:nvCxnSpPr>
+        <p:spPr>
+          <a:xfrm>
+            <a:off x="7528559" y="1371600"/>
+            <a:ext cx="0" cy="3931920"/>
+          </a:xfrm>
+          <a:prstGeom prst="line">
+            <a:avLst/>
+          </a:prstGeom>
+          <a:ln w="7620">
+            <a:solidFill>
+              <a:srgbClr val="2E4756"/>
+            </a:solidFill>
+          </a:ln>
+          <a:effectLst/>
+        </p:spPr>
+      </p:cxnSp>
+      <p:sp>
+        <p:nvSpPr>
+          <p:cNvPr id="26" name="C1-E02 text 24" descr="sci-ppt:o024"/>
+          <p:cNvSpPr txBox="1"/>
+          <p:nvPr/>
+        </p:nvSpPr>
+        <p:spPr>
+          <a:xfrm>
+            <a:off x="7071359" y="5385816"/>
+            <a:ext cx="914400" cy="208407"/>
+          </a:xfrm>
+          <a:prstGeom prst="rect">
+            <a:avLst/>
+          </a:prstGeom>
+          <a:noFill/>
+          <a:effectLst/>
+        </p:spPr>
+        <p:txBody>
+          <a:bodyPr wrap="none" lIns="18288" rIns="18288" tIns="18288" bIns="18288" anchor="t">
+            <a:spAutoFit/>
+          </a:bodyPr>
+          <a:lstStyle/>
+          <a:p>
+            <a:pPr algn="ctr">
+              <a:spcAft>
+                <a:spcPts val="0"/>
+              </a:spcAft>
+            </a:pPr>
+            <a:r>
+              <a:rPr sz="1050" b="0" i="0">
+                <a:solidFill>
+                  <a:srgbClr val="B4C7D2"/>
+                </a:solidFill>
+                <a:latin typeface="Arial"/>
+              </a:rPr>
+              <a:t>2</a:t>
+            </a:r>
+          </a:p>
+        </p:txBody>
+      </p:sp>
+      <p:cxnSp>
+        <p:nvCxnSpPr>
+          <p:cNvPr id="27" name="C1-E02 line 25" descr="sci-ppt:o025"/>
+          <p:cNvCxnSpPr/>
+          <p:nvPr/>
+        </p:nvCxnSpPr>
+        <p:spPr>
+          <a:xfrm>
+            <a:off x="9479280" y="5303520"/>
+            <a:ext cx="0" cy="64008"/>
+          </a:xfrm>
+          <a:prstGeom prst="line">
+            <a:avLst/>
+          </a:prstGeom>
+          <a:ln w="12700">
+            <a:solidFill>
+              <a:srgbClr val="B4C7D2"/>
+            </a:solidFill>
+          </a:ln>
+          <a:effectLst/>
+        </p:spPr>
+      </p:cxnSp>
+      <p:cxnSp>
+        <p:nvCxnSpPr>
+          <p:cNvPr id="28" name="C1-E02 line 26" descr="sci-ppt:o026"/>
+          <p:cNvCxnSpPr/>
+          <p:nvPr/>
+        </p:nvCxnSpPr>
+        <p:spPr>
+          <a:xfrm>
+            <a:off x="9479280" y="1371600"/>
+            <a:ext cx="0" cy="3931920"/>
+          </a:xfrm>
+          <a:prstGeom prst="line">
+            <a:avLst/>
+          </a:prstGeom>
+          <a:ln w="7620">
+            <a:solidFill>
+              <a:srgbClr val="2E4756"/>
+            </a:solidFill>
+          </a:ln>
+          <a:effectLst/>
+        </p:spPr>
+      </p:cxnSp>
+      <p:sp>
+        <p:nvSpPr>
+          <p:cNvPr id="29" name="C1-E02 text 27" descr="sci-ppt:o027"/>
+          <p:cNvSpPr txBox="1"/>
+          <p:nvPr/>
+        </p:nvSpPr>
+        <p:spPr>
+          <a:xfrm>
+            <a:off x="9022080" y="5385816"/>
+            <a:ext cx="914400" cy="208407"/>
+          </a:xfrm>
+          <a:prstGeom prst="rect">
+            <a:avLst/>
+          </a:prstGeom>
+          <a:noFill/>
+          <a:effectLst/>
+        </p:spPr>
+        <p:txBody>
+          <a:bodyPr wrap="none" lIns="18288" rIns="18288" tIns="18288" bIns="18288" anchor="t">
+            <a:spAutoFit/>
+          </a:bodyPr>
+          <a:lstStyle/>
+          <a:p>
+            <a:pPr algn="ctr">
+              <a:spcAft>
+                <a:spcPts val="0"/>
+              </a:spcAft>
+            </a:pPr>
+            <a:r>
+              <a:rPr sz="1050" b="0" i="0">
+                <a:solidFill>
+                  <a:srgbClr val="B4C7D2"/>
+                </a:solidFill>
+                <a:latin typeface="Arial"/>
+              </a:rPr>
+              <a:t>3</a:t>
+            </a:r>
+          </a:p>
+        </p:txBody>
+      </p:sp>
+      <p:cxnSp>
+        <p:nvCxnSpPr>
+          <p:cNvPr id="30" name="C1-E02 line 28" descr="sci-ppt:o028"/>
+          <p:cNvCxnSpPr/>
+          <p:nvPr/>
+        </p:nvCxnSpPr>
+        <p:spPr>
+          <a:xfrm>
+            <a:off x="11430000" y="5303520"/>
+            <a:ext cx="0" cy="64008"/>
+          </a:xfrm>
+          <a:prstGeom prst="line">
+            <a:avLst/>
+          </a:prstGeom>
+          <a:ln w="12700">
+            <a:solidFill>
+              <a:srgbClr val="B4C7D2"/>
+            </a:solidFill>
+          </a:ln>
+          <a:effectLst/>
+        </p:spPr>
+      </p:cxnSp>
+      <p:cxnSp>
+        <p:nvCxnSpPr>
+          <p:cNvPr id="31" name="C1-E02 line 29" descr="sci-ppt:o029"/>
+          <p:cNvCxnSpPr/>
+          <p:nvPr/>
+        </p:nvCxnSpPr>
+        <p:spPr>
+          <a:xfrm>
+            <a:off x="11430000" y="1371600"/>
+            <a:ext cx="0" cy="3931920"/>
+          </a:xfrm>
+          <a:prstGeom prst="line">
+            <a:avLst/>
+          </a:prstGeom>
+          <a:ln w="7620">
+            <a:solidFill>
+              <a:srgbClr val="2E4756"/>
+            </a:solidFill>
+          </a:ln>
+          <a:effectLst/>
+        </p:spPr>
+      </p:cxnSp>
+      <p:sp>
+        <p:nvSpPr>
+          <p:cNvPr id="32" name="C1-E02 text 30" descr="sci-ppt:o030"/>
+          <p:cNvSpPr txBox="1"/>
+          <p:nvPr/>
+        </p:nvSpPr>
+        <p:spPr>
+          <a:xfrm>
+            <a:off x="10972800" y="5385816"/>
+            <a:ext cx="914400" cy="208407"/>
+          </a:xfrm>
+          <a:prstGeom prst="rect">
+            <a:avLst/>
+          </a:prstGeom>
+          <a:noFill/>
+          <a:effectLst/>
+        </p:spPr>
+        <p:txBody>
+          <a:bodyPr wrap="none" lIns="18288" rIns="18288" tIns="18288" bIns="18288" anchor="t">
+            <a:spAutoFit/>
+          </a:bodyPr>
+          <a:lstStyle/>
+          <a:p>
+            <a:pPr algn="ctr">
+              <a:spcAft>
+                <a:spcPts val="0"/>
+              </a:spcAft>
+            </a:pPr>
+            <a:r>
+              <a:rPr sz="1050" b="0" i="0">
+                <a:solidFill>
+                  <a:srgbClr val="B4C7D2"/>
+                </a:solidFill>
+                <a:latin typeface="Arial"/>
+              </a:rPr>
+              <a:t>4</a:t>
+            </a:r>
+          </a:p>
+        </p:txBody>
+      </p:sp>
+      <p:cxnSp>
+        <p:nvCxnSpPr>
+          <p:cNvPr id="33" name="C1-E02 line 31" descr="sci-ppt:o031"/>
+          <p:cNvCxnSpPr/>
+          <p:nvPr/>
+        </p:nvCxnSpPr>
+        <p:spPr>
+          <a:xfrm>
+            <a:off x="5513831" y="5303520"/>
+            <a:ext cx="64009" cy="0"/>
+          </a:xfrm>
+          <a:prstGeom prst="line">
+            <a:avLst/>
+          </a:prstGeom>
+          <a:ln w="12700">
+            <a:solidFill>
+              <a:srgbClr val="B4C7D2"/>
+            </a:solidFill>
+          </a:ln>
+          <a:effectLst/>
+        </p:spPr>
+      </p:cxnSp>
+      <p:cxnSp>
+        <p:nvCxnSpPr>
+          <p:cNvPr id="34" name="C1-E02 line 32" descr="sci-ppt:o032"/>
+          <p:cNvCxnSpPr/>
+          <p:nvPr/>
+        </p:nvCxnSpPr>
+        <p:spPr>
+          <a:xfrm>
+            <a:off x="5513831" y="4517136"/>
+            <a:ext cx="64009" cy="0"/>
+          </a:xfrm>
+          <a:prstGeom prst="line">
+            <a:avLst/>
+          </a:prstGeom>
+          <a:ln w="12700">
+            <a:solidFill>
+              <a:srgbClr val="B4C7D2"/>
+            </a:solidFill>
+          </a:ln>
+          <a:effectLst/>
+        </p:spPr>
+      </p:cxnSp>
+      <p:cxnSp>
+        <p:nvCxnSpPr>
+          <p:cNvPr id="35" name="C1-E02 line 33" descr="sci-ppt:o033"/>
+          <p:cNvCxnSpPr/>
+          <p:nvPr/>
+        </p:nvCxnSpPr>
+        <p:spPr>
+          <a:xfrm>
+            <a:off x="5577840" y="4517136"/>
+            <a:ext cx="5852160" cy="0"/>
+          </a:xfrm>
+          <a:prstGeom prst="line">
+            <a:avLst/>
+          </a:prstGeom>
+          <a:ln w="7620">
+            <a:solidFill>
+              <a:srgbClr val="2E4756"/>
+            </a:solidFill>
+          </a:ln>
+          <a:effectLst/>
+        </p:spPr>
+      </p:cxnSp>
+      <p:sp>
+        <p:nvSpPr>
+          <p:cNvPr id="36" name="C1-E02 text 34" descr="sci-ppt:o034"/>
+          <p:cNvSpPr txBox="1"/>
+          <p:nvPr/>
+        </p:nvSpPr>
+        <p:spPr>
+          <a:xfrm>
+            <a:off x="4709159" y="4434840"/>
+            <a:ext cx="777240" cy="208407"/>
+          </a:xfrm>
+          <a:prstGeom prst="rect">
+            <a:avLst/>
+          </a:prstGeom>
+          <a:noFill/>
+          <a:effectLst/>
+        </p:spPr>
+        <p:txBody>
+          <a:bodyPr wrap="none" lIns="18288" rIns="18288" tIns="18288" bIns="18288" anchor="t">
+            <a:spAutoFit/>
+          </a:bodyPr>
+          <a:lstStyle/>
+          <a:p>
+            <a:pPr algn="r">
+              <a:spcAft>
+                <a:spcPts val="0"/>
+              </a:spcAft>
+            </a:pPr>
+            <a:r>
+              <a:rPr sz="1050" b="0" i="0">
+                <a:solidFill>
+                  <a:srgbClr val="B4C7D2"/>
+                </a:solidFill>
+                <a:latin typeface="Arial"/>
+              </a:rPr>
+              <a:t>0.25</a:t>
+            </a:r>
+          </a:p>
+        </p:txBody>
+      </p:sp>
+      <p:cxnSp>
+        <p:nvCxnSpPr>
+          <p:cNvPr id="37" name="C1-E02 line 35" descr="sci-ppt:o035"/>
+          <p:cNvCxnSpPr/>
+          <p:nvPr/>
+        </p:nvCxnSpPr>
+        <p:spPr>
+          <a:xfrm>
+            <a:off x="5513831" y="3730752"/>
+            <a:ext cx="64009" cy="0"/>
+          </a:xfrm>
+          <a:prstGeom prst="line">
+            <a:avLst/>
+          </a:prstGeom>
+          <a:ln w="12700">
+            <a:solidFill>
+              <a:srgbClr val="B4C7D2"/>
+            </a:solidFill>
+          </a:ln>
+          <a:effectLst/>
+        </p:spPr>
+      </p:cxnSp>
+      <p:cxnSp>
+        <p:nvCxnSpPr>
+          <p:cNvPr id="38" name="C1-E02 line 36" descr="sci-ppt:o036"/>
+          <p:cNvCxnSpPr/>
+          <p:nvPr/>
+        </p:nvCxnSpPr>
+        <p:spPr>
+          <a:xfrm>
+            <a:off x="5577840" y="3730752"/>
+            <a:ext cx="5852160" cy="0"/>
+          </a:xfrm>
+          <a:prstGeom prst="line">
+            <a:avLst/>
+          </a:prstGeom>
+          <a:ln w="7620">
+            <a:solidFill>
+              <a:srgbClr val="2E4756"/>
+            </a:solidFill>
+          </a:ln>
+          <a:effectLst/>
+        </p:spPr>
+      </p:cxnSp>
+      <p:sp>
+        <p:nvSpPr>
+          <p:cNvPr id="39" name="C1-E02 text 37" descr="sci-ppt:o037"/>
+          <p:cNvSpPr txBox="1"/>
+          <p:nvPr/>
+        </p:nvSpPr>
+        <p:spPr>
+          <a:xfrm>
+            <a:off x="4709159" y="3648456"/>
+            <a:ext cx="777240" cy="208407"/>
+          </a:xfrm>
+          <a:prstGeom prst="rect">
+            <a:avLst/>
+          </a:prstGeom>
+          <a:noFill/>
+          <a:effectLst/>
+        </p:spPr>
+        <p:txBody>
+          <a:bodyPr wrap="none" lIns="18288" rIns="18288" tIns="18288" bIns="18288" anchor="t">
+            <a:spAutoFit/>
+          </a:bodyPr>
+          <a:lstStyle/>
+          <a:p>
+            <a:pPr algn="r">
+              <a:spcAft>
+                <a:spcPts val="0"/>
+              </a:spcAft>
+            </a:pPr>
+            <a:r>
+              <a:rPr sz="1050" b="0" i="0">
+                <a:solidFill>
+                  <a:srgbClr val="B4C7D2"/>
+                </a:solidFill>
+                <a:latin typeface="Arial"/>
+              </a:rPr>
+              <a:t>0.50</a:t>
+            </a:r>
+          </a:p>
+        </p:txBody>
+      </p:sp>
+      <p:cxnSp>
+        <p:nvCxnSpPr>
+          <p:cNvPr id="40" name="C1-E02 line 38" descr="sci-ppt:o038"/>
+          <p:cNvCxnSpPr/>
+          <p:nvPr/>
+        </p:nvCxnSpPr>
+        <p:spPr>
+          <a:xfrm>
+            <a:off x="5513831" y="2944368"/>
+            <a:ext cx="64009" cy="0"/>
+          </a:xfrm>
+          <a:prstGeom prst="line">
+            <a:avLst/>
+          </a:prstGeom>
+          <a:ln w="12700">
+            <a:solidFill>
+              <a:srgbClr val="B4C7D2"/>
+            </a:solidFill>
+          </a:ln>
+          <a:effectLst/>
+        </p:spPr>
+      </p:cxnSp>
+      <p:cxnSp>
+        <p:nvCxnSpPr>
+          <p:cNvPr id="41" name="C1-E02 line 39" descr="sci-ppt:o039"/>
+          <p:cNvCxnSpPr/>
+          <p:nvPr/>
+        </p:nvCxnSpPr>
+        <p:spPr>
+          <a:xfrm>
+            <a:off x="5577840" y="2944368"/>
+            <a:ext cx="5852160" cy="0"/>
+          </a:xfrm>
+          <a:prstGeom prst="line">
+            <a:avLst/>
+          </a:prstGeom>
+          <a:ln w="7620">
+            <a:solidFill>
+              <a:srgbClr val="2E4756"/>
+            </a:solidFill>
+          </a:ln>
+          <a:effectLst/>
+        </p:spPr>
+      </p:cxnSp>
+      <p:sp>
+        <p:nvSpPr>
+          <p:cNvPr id="42" name="C1-E02 text 40" descr="sci-ppt:o040"/>
+          <p:cNvSpPr txBox="1"/>
+          <p:nvPr/>
+        </p:nvSpPr>
+        <p:spPr>
+          <a:xfrm>
+            <a:off x="4709159" y="2862072"/>
+            <a:ext cx="777240" cy="208407"/>
+          </a:xfrm>
+          <a:prstGeom prst="rect">
+            <a:avLst/>
+          </a:prstGeom>
+          <a:noFill/>
+          <a:effectLst/>
+        </p:spPr>
+        <p:txBody>
+          <a:bodyPr wrap="none" lIns="18288" rIns="18288" tIns="18288" bIns="18288" anchor="t">
+            <a:spAutoFit/>
+          </a:bodyPr>
+          <a:lstStyle/>
+          <a:p>
+            <a:pPr algn="r">
+              <a:spcAft>
+                <a:spcPts val="0"/>
+              </a:spcAft>
+            </a:pPr>
+            <a:r>
+              <a:rPr sz="1050" b="0" i="0">
+                <a:solidFill>
+                  <a:srgbClr val="B4C7D2"/>
+                </a:solidFill>
+                <a:latin typeface="Arial"/>
+              </a:rPr>
+              <a:t>0.75</a:t>
+            </a:r>
+          </a:p>
+        </p:txBody>
+      </p:sp>
+      <p:cxnSp>
+        <p:nvCxnSpPr>
+          <p:cNvPr id="43" name="C1-E02 line 41" descr="sci-ppt:o041"/>
+          <p:cNvCxnSpPr/>
+          <p:nvPr/>
+        </p:nvCxnSpPr>
+        <p:spPr>
+          <a:xfrm>
+            <a:off x="5513831" y="2157984"/>
+            <a:ext cx="64009" cy="0"/>
+          </a:xfrm>
+          <a:prstGeom prst="line">
+            <a:avLst/>
+          </a:prstGeom>
+          <a:ln w="12700">
+            <a:solidFill>
+              <a:srgbClr val="B4C7D2"/>
+            </a:solidFill>
+          </a:ln>
+          <a:effectLst/>
+        </p:spPr>
+      </p:cxnSp>
+      <p:cxnSp>
+        <p:nvCxnSpPr>
+          <p:cNvPr id="44" name="C1-E02 line 42" descr="sci-ppt:o042"/>
+          <p:cNvCxnSpPr/>
+          <p:nvPr/>
+        </p:nvCxnSpPr>
+        <p:spPr>
+          <a:xfrm>
+            <a:off x="5577840" y="2157984"/>
+            <a:ext cx="5852160" cy="0"/>
+          </a:xfrm>
+          <a:prstGeom prst="line">
+            <a:avLst/>
+          </a:prstGeom>
+          <a:ln w="7620">
+            <a:solidFill>
+              <a:srgbClr val="2E4756"/>
+            </a:solidFill>
+          </a:ln>
+          <a:effectLst/>
+        </p:spPr>
+      </p:cxnSp>
+      <p:sp>
+        <p:nvSpPr>
+          <p:cNvPr id="45" name="C1-E02 text 43" descr="sci-ppt:o043"/>
+          <p:cNvSpPr txBox="1"/>
+          <p:nvPr/>
+        </p:nvSpPr>
+        <p:spPr>
+          <a:xfrm>
+            <a:off x="4709159" y="2075688"/>
+            <a:ext cx="777240" cy="208407"/>
+          </a:xfrm>
+          <a:prstGeom prst="rect">
+            <a:avLst/>
+          </a:prstGeom>
+          <a:noFill/>
+          <a:effectLst/>
+        </p:spPr>
+        <p:txBody>
+          <a:bodyPr wrap="none" lIns="18288" rIns="18288" tIns="18288" bIns="18288" anchor="t">
+            <a:spAutoFit/>
+          </a:bodyPr>
+          <a:lstStyle/>
+          <a:p>
+            <a:pPr algn="r">
+              <a:spcAft>
+                <a:spcPts val="0"/>
+              </a:spcAft>
+            </a:pPr>
+            <a:r>
+              <a:rPr sz="1050" b="0" i="0">
+                <a:solidFill>
+                  <a:srgbClr val="B4C7D2"/>
+                </a:solidFill>
+                <a:latin typeface="Arial"/>
+              </a:rPr>
+              <a:t>1.00</a:t>
+            </a:r>
+          </a:p>
+        </p:txBody>
+      </p:sp>
+      <p:sp>
+        <p:nvSpPr>
+          <p:cNvPr id="46" name="C1-E02 text 44" descr="sci-ppt:o044"/>
+          <p:cNvSpPr txBox="1"/>
+          <p:nvPr/>
+        </p:nvSpPr>
+        <p:spPr>
+          <a:xfrm>
+            <a:off x="5577840" y="5586983"/>
+            <a:ext cx="5852160" cy="231648"/>
+          </a:xfrm>
+          <a:prstGeom prst="rect">
+            <a:avLst/>
+          </a:prstGeom>
+          <a:noFill/>
+          <a:effectLst/>
+        </p:spPr>
+        <p:txBody>
+          <a:bodyPr wrap="none" lIns="18288" rIns="18288" tIns="18288" bIns="18288" anchor="t">
+            <a:spAutoFit/>
+          </a:bodyPr>
+          <a:lstStyle/>
+          <a:p>
+            <a:pPr algn="ctr">
+              <a:spcAft>
+                <a:spcPts val="0"/>
+              </a:spcAft>
+            </a:pPr>
+            <a:r>
+              <a:rPr sz="1200" b="0" i="0">
+                <a:solidFill>
+                  <a:srgbClr val="E7F0F3"/>
+                </a:solidFill>
+                <a:latin typeface="Arial"/>
+              </a:rPr>
+              <a:t>r / R</a:t>
+            </a:r>
+          </a:p>
+        </p:txBody>
+      </p:sp>
+      <p:sp>
+        <p:nvSpPr>
+          <p:cNvPr id="47" name="C1-E02 text 45" descr="sci-ppt:o045"/>
+          <p:cNvSpPr txBox="1"/>
+          <p:nvPr/>
+        </p:nvSpPr>
+        <p:spPr>
+          <a:xfrm>
+            <a:off x="5029200" y="1024128"/>
+            <a:ext cx="5852160" cy="231648"/>
+          </a:xfrm>
+          <a:prstGeom prst="rect">
+            <a:avLst/>
+          </a:prstGeom>
+          <a:noFill/>
+          <a:effectLst/>
+        </p:spPr>
+        <p:txBody>
+          <a:bodyPr wrap="none" lIns="18288" rIns="18288" tIns="18288" bIns="18288" anchor="t">
             <a:spAutoFit/>
           </a:bodyPr>
           <a:lstStyle/>
@@ -3579,27 +4479,856 @@
               </a:spcAft>
             </a:pPr>
             <a:r>
-              <a:rPr sz="1920" b="0" i="0">
+              <a:rPr sz="1200" b="0" i="0">
                 <a:solidFill>
                   <a:srgbClr val="E7F0F3"/>
                 </a:solidFill>
                 <a:latin typeface="Arial"/>
               </a:rPr>
-              <a:t>u(2R) = (Ṙ)/4</a:t>
-            </a:r>
-          </a:p>
-        </p:txBody>
-      </p:sp>
-      <p:sp>
-        <p:nvSpPr>
-          <p:cNvPr id="16" name="text15" descr="sci-ppt:C1-E02-015"/>
+              <a:t>dimensionless</a:t>
+            </a:r>
+          </a:p>
+        </p:txBody>
+      </p:sp>
+      <p:sp>
+        <p:nvSpPr>
+          <p:cNvPr id="48" name="C1-E02 polygon 46" descr="sci-ppt:o046"/>
+          <p:cNvSpPr/>
+          <p:nvPr/>
+        </p:nvSpPr>
+        <p:spPr>
+          <a:xfrm>
+            <a:off x="5577840" y="2157984"/>
+            <a:ext cx="5852160" cy="2948940"/>
+          </a:xfrm>
+          <a:custGeom>
+            <a:avLst/>
+            <a:gdLst/>
+            <a:ahLst/>
+            <a:cxnLst/>
+            <a:rect l="l" t="t" r="r" b="b"/>
+            <a:pathLst>
+              <a:path w="5852160" h="2948940">
+                <a:moveTo>
+                  <a:pt x="0" y="0"/>
+                </a:moveTo>
+                <a:lnTo>
+                  <a:pt x="49177" y="152796"/>
+                </a:lnTo>
+                <a:lnTo>
+                  <a:pt x="98355" y="294724"/>
+                </a:lnTo>
+                <a:lnTo>
+                  <a:pt x="147533" y="426789"/>
+                </a:lnTo>
+                <a:lnTo>
+                  <a:pt x="196711" y="549886"/>
+                </a:lnTo>
+                <a:lnTo>
+                  <a:pt x="245889" y="664808"/>
+                </a:lnTo>
+                <a:lnTo>
+                  <a:pt x="295066" y="772264"/>
+                </a:lnTo>
+                <a:lnTo>
+                  <a:pt x="344244" y="872886"/>
+                </a:lnTo>
+                <a:lnTo>
+                  <a:pt x="393422" y="967241"/>
+                </a:lnTo>
+                <a:lnTo>
+                  <a:pt x="442600" y="1055841"/>
+                </a:lnTo>
+                <a:lnTo>
+                  <a:pt x="491778" y="1139142"/>
+                </a:lnTo>
+                <a:lnTo>
+                  <a:pt x="540955" y="1217560"/>
+                </a:lnTo>
+                <a:lnTo>
+                  <a:pt x="590133" y="1291470"/>
+                </a:lnTo>
+                <a:lnTo>
+                  <a:pt x="639311" y="1361209"/>
+                </a:lnTo>
+                <a:lnTo>
+                  <a:pt x="688489" y="1427086"/>
+                </a:lnTo>
+                <a:lnTo>
+                  <a:pt x="737667" y="1489381"/>
+                </a:lnTo>
+                <a:lnTo>
+                  <a:pt x="786845" y="1548349"/>
+                </a:lnTo>
+                <a:lnTo>
+                  <a:pt x="836022" y="1604223"/>
+                </a:lnTo>
+                <a:lnTo>
+                  <a:pt x="885200" y="1657215"/>
+                </a:lnTo>
+                <a:lnTo>
+                  <a:pt x="934378" y="1707521"/>
+                </a:lnTo>
+                <a:lnTo>
+                  <a:pt x="983556" y="1755319"/>
+                </a:lnTo>
+                <a:lnTo>
+                  <a:pt x="1032734" y="1800772"/>
+                </a:lnTo>
+                <a:lnTo>
+                  <a:pt x="1081911" y="1844033"/>
+                </a:lnTo>
+                <a:lnTo>
+                  <a:pt x="1131089" y="1885239"/>
+                </a:lnTo>
+                <a:lnTo>
+                  <a:pt x="1180267" y="1924518"/>
+                </a:lnTo>
+                <a:lnTo>
+                  <a:pt x="1229445" y="1961990"/>
+                </a:lnTo>
+                <a:lnTo>
+                  <a:pt x="1278623" y="1997762"/>
+                </a:lnTo>
+                <a:lnTo>
+                  <a:pt x="1327801" y="2031937"/>
+                </a:lnTo>
+                <a:lnTo>
+                  <a:pt x="1376978" y="2064608"/>
+                </a:lnTo>
+                <a:lnTo>
+                  <a:pt x="1426156" y="2095862"/>
+                </a:lnTo>
+                <a:lnTo>
+                  <a:pt x="1475334" y="2125780"/>
+                </a:lnTo>
+                <a:lnTo>
+                  <a:pt x="1524512" y="2154437"/>
+                </a:lnTo>
+                <a:lnTo>
+                  <a:pt x="1573690" y="2181903"/>
+                </a:lnTo>
+                <a:lnTo>
+                  <a:pt x="1622867" y="2208242"/>
+                </a:lnTo>
+                <a:lnTo>
+                  <a:pt x="1672045" y="2233516"/>
+                </a:lnTo>
+                <a:lnTo>
+                  <a:pt x="1721223" y="2257782"/>
+                </a:lnTo>
+                <a:lnTo>
+                  <a:pt x="1770401" y="2281091"/>
+                </a:lnTo>
+                <a:lnTo>
+                  <a:pt x="1819579" y="2303495"/>
+                </a:lnTo>
+                <a:lnTo>
+                  <a:pt x="1868756" y="2325039"/>
+                </a:lnTo>
+                <a:lnTo>
+                  <a:pt x="1917934" y="2345766"/>
+                </a:lnTo>
+                <a:lnTo>
+                  <a:pt x="1967112" y="2365718"/>
+                </a:lnTo>
+                <a:lnTo>
+                  <a:pt x="2016290" y="2384933"/>
+                </a:lnTo>
+                <a:lnTo>
+                  <a:pt x="2065468" y="2403446"/>
+                </a:lnTo>
+                <a:lnTo>
+                  <a:pt x="2114646" y="2421291"/>
+                </a:lnTo>
+                <a:lnTo>
+                  <a:pt x="2163823" y="2438500"/>
+                </a:lnTo>
+                <a:lnTo>
+                  <a:pt x="2213001" y="2455103"/>
+                </a:lnTo>
+                <a:lnTo>
+                  <a:pt x="2262179" y="2471128"/>
+                </a:lnTo>
+                <a:lnTo>
+                  <a:pt x="2311357" y="2486602"/>
+                </a:lnTo>
+                <a:lnTo>
+                  <a:pt x="2360535" y="2501549"/>
+                </a:lnTo>
+                <a:lnTo>
+                  <a:pt x="2409712" y="2515993"/>
+                </a:lnTo>
+                <a:lnTo>
+                  <a:pt x="2458890" y="2529956"/>
+                </a:lnTo>
+                <a:lnTo>
+                  <a:pt x="2508068" y="2543460"/>
+                </a:lnTo>
+                <a:lnTo>
+                  <a:pt x="2557246" y="2556525"/>
+                </a:lnTo>
+                <a:lnTo>
+                  <a:pt x="2606424" y="2569169"/>
+                </a:lnTo>
+                <a:lnTo>
+                  <a:pt x="2655602" y="2581410"/>
+                </a:lnTo>
+                <a:lnTo>
+                  <a:pt x="2704779" y="2593265"/>
+                </a:lnTo>
+                <a:lnTo>
+                  <a:pt x="2753957" y="2604750"/>
+                </a:lnTo>
+                <a:lnTo>
+                  <a:pt x="2803135" y="2615881"/>
+                </a:lnTo>
+                <a:lnTo>
+                  <a:pt x="2852313" y="2626672"/>
+                </a:lnTo>
+                <a:lnTo>
+                  <a:pt x="2901491" y="2637136"/>
+                </a:lnTo>
+                <a:lnTo>
+                  <a:pt x="2950668" y="2647287"/>
+                </a:lnTo>
+                <a:lnTo>
+                  <a:pt x="2999846" y="2657137"/>
+                </a:lnTo>
+                <a:lnTo>
+                  <a:pt x="3049024" y="2666697"/>
+                </a:lnTo>
+                <a:lnTo>
+                  <a:pt x="3098202" y="2675980"/>
+                </a:lnTo>
+                <a:lnTo>
+                  <a:pt x="3147380" y="2684995"/>
+                </a:lnTo>
+                <a:lnTo>
+                  <a:pt x="3196557" y="2693753"/>
+                </a:lnTo>
+                <a:lnTo>
+                  <a:pt x="3245735" y="2702264"/>
+                </a:lnTo>
+                <a:lnTo>
+                  <a:pt x="3294913" y="2710536"/>
+                </a:lnTo>
+                <a:lnTo>
+                  <a:pt x="3344091" y="2718579"/>
+                </a:lnTo>
+                <a:lnTo>
+                  <a:pt x="3393269" y="2726401"/>
+                </a:lnTo>
+                <a:lnTo>
+                  <a:pt x="3442447" y="2734010"/>
+                </a:lnTo>
+                <a:lnTo>
+                  <a:pt x="3491624" y="2741414"/>
+                </a:lnTo>
+                <a:lnTo>
+                  <a:pt x="3540802" y="2748619"/>
+                </a:lnTo>
+                <a:lnTo>
+                  <a:pt x="3589980" y="2755634"/>
+                </a:lnTo>
+                <a:lnTo>
+                  <a:pt x="3639158" y="2762464"/>
+                </a:lnTo>
+                <a:lnTo>
+                  <a:pt x="3688336" y="2769116"/>
+                </a:lnTo>
+                <a:lnTo>
+                  <a:pt x="3737513" y="2775597"/>
+                </a:lnTo>
+                <a:lnTo>
+                  <a:pt x="3786691" y="2781912"/>
+                </a:lnTo>
+                <a:lnTo>
+                  <a:pt x="3835869" y="2788066"/>
+                </a:lnTo>
+                <a:lnTo>
+                  <a:pt x="3885047" y="2794065"/>
+                </a:lnTo>
+                <a:lnTo>
+                  <a:pt x="3934225" y="2799915"/>
+                </a:lnTo>
+                <a:lnTo>
+                  <a:pt x="3983403" y="2805620"/>
+                </a:lnTo>
+                <a:lnTo>
+                  <a:pt x="4032580" y="2811184"/>
+                </a:lnTo>
+                <a:lnTo>
+                  <a:pt x="4081758" y="2816613"/>
+                </a:lnTo>
+                <a:lnTo>
+                  <a:pt x="4130936" y="2821911"/>
+                </a:lnTo>
+                <a:lnTo>
+                  <a:pt x="4180114" y="2827082"/>
+                </a:lnTo>
+                <a:lnTo>
+                  <a:pt x="4229292" y="2832131"/>
+                </a:lnTo>
+                <a:lnTo>
+                  <a:pt x="4278469" y="2837059"/>
+                </a:lnTo>
+                <a:lnTo>
+                  <a:pt x="4327647" y="2841873"/>
+                </a:lnTo>
+                <a:lnTo>
+                  <a:pt x="4376825" y="2846575"/>
+                </a:lnTo>
+                <a:lnTo>
+                  <a:pt x="4426003" y="2851168"/>
+                </a:lnTo>
+                <a:lnTo>
+                  <a:pt x="4475181" y="2855657"/>
+                </a:lnTo>
+                <a:lnTo>
+                  <a:pt x="4524358" y="2860043"/>
+                </a:lnTo>
+                <a:lnTo>
+                  <a:pt x="4573536" y="2864331"/>
+                </a:lnTo>
+                <a:lnTo>
+                  <a:pt x="4622714" y="2868523"/>
+                </a:lnTo>
+                <a:lnTo>
+                  <a:pt x="4671892" y="2872621"/>
+                </a:lnTo>
+                <a:lnTo>
+                  <a:pt x="4721070" y="2876630"/>
+                </a:lnTo>
+                <a:lnTo>
+                  <a:pt x="4770248" y="2880551"/>
+                </a:lnTo>
+                <a:lnTo>
+                  <a:pt x="4819425" y="2884386"/>
+                </a:lnTo>
+                <a:lnTo>
+                  <a:pt x="4868603" y="2888139"/>
+                </a:lnTo>
+                <a:lnTo>
+                  <a:pt x="4917781" y="2891812"/>
+                </a:lnTo>
+                <a:lnTo>
+                  <a:pt x="4966959" y="2895407"/>
+                </a:lnTo>
+                <a:lnTo>
+                  <a:pt x="5016137" y="2898925"/>
+                </a:lnTo>
+                <a:lnTo>
+                  <a:pt x="5065314" y="2902371"/>
+                </a:lnTo>
+                <a:lnTo>
+                  <a:pt x="5114492" y="2905744"/>
+                </a:lnTo>
+                <a:lnTo>
+                  <a:pt x="5163670" y="2909047"/>
+                </a:lnTo>
+                <a:lnTo>
+                  <a:pt x="5212848" y="2912283"/>
+                </a:lnTo>
+                <a:lnTo>
+                  <a:pt x="5262026" y="2915453"/>
+                </a:lnTo>
+                <a:lnTo>
+                  <a:pt x="5311204" y="2918559"/>
+                </a:lnTo>
+                <a:lnTo>
+                  <a:pt x="5360381" y="2921602"/>
+                </a:lnTo>
+                <a:lnTo>
+                  <a:pt x="5409559" y="2924585"/>
+                </a:lnTo>
+                <a:lnTo>
+                  <a:pt x="5458737" y="2927508"/>
+                </a:lnTo>
+                <a:lnTo>
+                  <a:pt x="5507915" y="2930373"/>
+                </a:lnTo>
+                <a:lnTo>
+                  <a:pt x="5557093" y="2933183"/>
+                </a:lnTo>
+                <a:lnTo>
+                  <a:pt x="5606270" y="2935938"/>
+                </a:lnTo>
+                <a:lnTo>
+                  <a:pt x="5655448" y="2938639"/>
+                </a:lnTo>
+                <a:lnTo>
+                  <a:pt x="5704626" y="2941289"/>
+                </a:lnTo>
+                <a:lnTo>
+                  <a:pt x="5753804" y="2943888"/>
+                </a:lnTo>
+                <a:lnTo>
+                  <a:pt x="5802982" y="2946438"/>
+                </a:lnTo>
+                <a:lnTo>
+                  <a:pt x="5852160" y="2948940"/>
+                </a:lnTo>
+              </a:path>
+            </a:pathLst>
+          </a:custGeom>
+          <a:noFill/>
+          <a:ln w="38100">
+            <a:solidFill>
+              <a:srgbClr val="8EDBD4"/>
+            </a:solidFill>
+          </a:ln>
+          <a:effectLst/>
+        </p:spPr>
+        <p:txBody>
+          <a:bodyPr rtlCol="0" anchor="ctr"/>
+          <a:lstStyle/>
+          <a:p>
+            <a:pPr algn="ctr"/>
+          </a:p>
+        </p:txBody>
+      </p:sp>
+      <p:sp>
+        <p:nvSpPr>
+          <p:cNvPr id="49" name="C1-E02 polygon 47" descr="sci-ppt:o047"/>
+          <p:cNvSpPr/>
+          <p:nvPr/>
+        </p:nvSpPr>
+        <p:spPr>
+          <a:xfrm>
+            <a:off x="5577840" y="2157984"/>
+            <a:ext cx="5852160" cy="0"/>
+          </a:xfrm>
+          <a:custGeom>
+            <a:avLst/>
+            <a:gdLst/>
+            <a:ahLst/>
+            <a:cxnLst/>
+            <a:rect l="l" t="t" r="r" b="b"/>
+            <a:pathLst>
+              <a:path w="5852160" h="0">
+                <a:moveTo>
+                  <a:pt x="0" y="0"/>
+                </a:moveTo>
+                <a:lnTo>
+                  <a:pt x="49177" y="0"/>
+                </a:lnTo>
+                <a:lnTo>
+                  <a:pt x="98355" y="0"/>
+                </a:lnTo>
+                <a:lnTo>
+                  <a:pt x="147533" y="0"/>
+                </a:lnTo>
+                <a:lnTo>
+                  <a:pt x="196711" y="0"/>
+                </a:lnTo>
+                <a:lnTo>
+                  <a:pt x="245889" y="0"/>
+                </a:lnTo>
+                <a:lnTo>
+                  <a:pt x="295066" y="0"/>
+                </a:lnTo>
+                <a:lnTo>
+                  <a:pt x="344244" y="0"/>
+                </a:lnTo>
+                <a:lnTo>
+                  <a:pt x="393422" y="0"/>
+                </a:lnTo>
+                <a:lnTo>
+                  <a:pt x="442600" y="0"/>
+                </a:lnTo>
+                <a:lnTo>
+                  <a:pt x="491778" y="0"/>
+                </a:lnTo>
+                <a:lnTo>
+                  <a:pt x="540955" y="0"/>
+                </a:lnTo>
+                <a:lnTo>
+                  <a:pt x="590133" y="0"/>
+                </a:lnTo>
+                <a:lnTo>
+                  <a:pt x="639311" y="0"/>
+                </a:lnTo>
+                <a:lnTo>
+                  <a:pt x="688489" y="0"/>
+                </a:lnTo>
+                <a:lnTo>
+                  <a:pt x="737667" y="0"/>
+                </a:lnTo>
+                <a:lnTo>
+                  <a:pt x="786845" y="0"/>
+                </a:lnTo>
+                <a:lnTo>
+                  <a:pt x="836022" y="0"/>
+                </a:lnTo>
+                <a:lnTo>
+                  <a:pt x="885200" y="0"/>
+                </a:lnTo>
+                <a:lnTo>
+                  <a:pt x="934378" y="0"/>
+                </a:lnTo>
+                <a:lnTo>
+                  <a:pt x="983556" y="0"/>
+                </a:lnTo>
+                <a:lnTo>
+                  <a:pt x="1032734" y="0"/>
+                </a:lnTo>
+                <a:lnTo>
+                  <a:pt x="1081911" y="0"/>
+                </a:lnTo>
+                <a:lnTo>
+                  <a:pt x="1131089" y="0"/>
+                </a:lnTo>
+                <a:lnTo>
+                  <a:pt x="1180267" y="0"/>
+                </a:lnTo>
+                <a:lnTo>
+                  <a:pt x="1229445" y="0"/>
+                </a:lnTo>
+                <a:lnTo>
+                  <a:pt x="1278623" y="0"/>
+                </a:lnTo>
+                <a:lnTo>
+                  <a:pt x="1327801" y="0"/>
+                </a:lnTo>
+                <a:lnTo>
+                  <a:pt x="1376978" y="0"/>
+                </a:lnTo>
+                <a:lnTo>
+                  <a:pt x="1426156" y="0"/>
+                </a:lnTo>
+                <a:lnTo>
+                  <a:pt x="1475334" y="0"/>
+                </a:lnTo>
+                <a:lnTo>
+                  <a:pt x="1524512" y="0"/>
+                </a:lnTo>
+                <a:lnTo>
+                  <a:pt x="1573690" y="0"/>
+                </a:lnTo>
+                <a:lnTo>
+                  <a:pt x="1622867" y="0"/>
+                </a:lnTo>
+                <a:lnTo>
+                  <a:pt x="1672045" y="0"/>
+                </a:lnTo>
+                <a:lnTo>
+                  <a:pt x="1721223" y="0"/>
+                </a:lnTo>
+                <a:lnTo>
+                  <a:pt x="1770401" y="0"/>
+                </a:lnTo>
+                <a:lnTo>
+                  <a:pt x="1819579" y="0"/>
+                </a:lnTo>
+                <a:lnTo>
+                  <a:pt x="1868756" y="0"/>
+                </a:lnTo>
+                <a:lnTo>
+                  <a:pt x="1917934" y="0"/>
+                </a:lnTo>
+                <a:lnTo>
+                  <a:pt x="1967112" y="0"/>
+                </a:lnTo>
+                <a:lnTo>
+                  <a:pt x="2016290" y="0"/>
+                </a:lnTo>
+                <a:lnTo>
+                  <a:pt x="2065468" y="0"/>
+                </a:lnTo>
+                <a:lnTo>
+                  <a:pt x="2114646" y="0"/>
+                </a:lnTo>
+                <a:lnTo>
+                  <a:pt x="2163823" y="0"/>
+                </a:lnTo>
+                <a:lnTo>
+                  <a:pt x="2213001" y="0"/>
+                </a:lnTo>
+                <a:lnTo>
+                  <a:pt x="2262179" y="0"/>
+                </a:lnTo>
+                <a:lnTo>
+                  <a:pt x="2311357" y="0"/>
+                </a:lnTo>
+                <a:lnTo>
+                  <a:pt x="2360535" y="0"/>
+                </a:lnTo>
+                <a:lnTo>
+                  <a:pt x="2409712" y="0"/>
+                </a:lnTo>
+                <a:lnTo>
+                  <a:pt x="2458890" y="0"/>
+                </a:lnTo>
+                <a:lnTo>
+                  <a:pt x="2508068" y="0"/>
+                </a:lnTo>
+                <a:lnTo>
+                  <a:pt x="2557246" y="0"/>
+                </a:lnTo>
+                <a:lnTo>
+                  <a:pt x="2606424" y="0"/>
+                </a:lnTo>
+                <a:lnTo>
+                  <a:pt x="2655602" y="0"/>
+                </a:lnTo>
+                <a:lnTo>
+                  <a:pt x="2704779" y="0"/>
+                </a:lnTo>
+                <a:lnTo>
+                  <a:pt x="2753957" y="0"/>
+                </a:lnTo>
+                <a:lnTo>
+                  <a:pt x="2803135" y="0"/>
+                </a:lnTo>
+                <a:lnTo>
+                  <a:pt x="2852313" y="0"/>
+                </a:lnTo>
+                <a:lnTo>
+                  <a:pt x="2901491" y="0"/>
+                </a:lnTo>
+                <a:lnTo>
+                  <a:pt x="2950668" y="0"/>
+                </a:lnTo>
+                <a:lnTo>
+                  <a:pt x="2999846" y="0"/>
+                </a:lnTo>
+                <a:lnTo>
+                  <a:pt x="3049024" y="0"/>
+                </a:lnTo>
+                <a:lnTo>
+                  <a:pt x="3098202" y="0"/>
+                </a:lnTo>
+                <a:lnTo>
+                  <a:pt x="3147380" y="0"/>
+                </a:lnTo>
+                <a:lnTo>
+                  <a:pt x="3196557" y="0"/>
+                </a:lnTo>
+                <a:lnTo>
+                  <a:pt x="3245735" y="0"/>
+                </a:lnTo>
+                <a:lnTo>
+                  <a:pt x="3294913" y="0"/>
+                </a:lnTo>
+                <a:lnTo>
+                  <a:pt x="3344091" y="0"/>
+                </a:lnTo>
+                <a:lnTo>
+                  <a:pt x="3393269" y="0"/>
+                </a:lnTo>
+                <a:lnTo>
+                  <a:pt x="3442447" y="0"/>
+                </a:lnTo>
+                <a:lnTo>
+                  <a:pt x="3491624" y="0"/>
+                </a:lnTo>
+                <a:lnTo>
+                  <a:pt x="3540802" y="0"/>
+                </a:lnTo>
+                <a:lnTo>
+                  <a:pt x="3589980" y="0"/>
+                </a:lnTo>
+                <a:lnTo>
+                  <a:pt x="3639158" y="0"/>
+                </a:lnTo>
+                <a:lnTo>
+                  <a:pt x="3688336" y="0"/>
+                </a:lnTo>
+                <a:lnTo>
+                  <a:pt x="3737513" y="0"/>
+                </a:lnTo>
+                <a:lnTo>
+                  <a:pt x="3786691" y="0"/>
+                </a:lnTo>
+                <a:lnTo>
+                  <a:pt x="3835869" y="0"/>
+                </a:lnTo>
+                <a:lnTo>
+                  <a:pt x="3885047" y="0"/>
+                </a:lnTo>
+                <a:lnTo>
+                  <a:pt x="3934225" y="0"/>
+                </a:lnTo>
+                <a:lnTo>
+                  <a:pt x="3983403" y="0"/>
+                </a:lnTo>
+                <a:lnTo>
+                  <a:pt x="4032580" y="0"/>
+                </a:lnTo>
+                <a:lnTo>
+                  <a:pt x="4081758" y="0"/>
+                </a:lnTo>
+                <a:lnTo>
+                  <a:pt x="4130936" y="0"/>
+                </a:lnTo>
+                <a:lnTo>
+                  <a:pt x="4180114" y="0"/>
+                </a:lnTo>
+                <a:lnTo>
+                  <a:pt x="4229292" y="0"/>
+                </a:lnTo>
+                <a:lnTo>
+                  <a:pt x="4278469" y="0"/>
+                </a:lnTo>
+                <a:lnTo>
+                  <a:pt x="4327647" y="0"/>
+                </a:lnTo>
+                <a:lnTo>
+                  <a:pt x="4376825" y="0"/>
+                </a:lnTo>
+                <a:lnTo>
+                  <a:pt x="4426003" y="0"/>
+                </a:lnTo>
+                <a:lnTo>
+                  <a:pt x="4475181" y="0"/>
+                </a:lnTo>
+                <a:lnTo>
+                  <a:pt x="4524358" y="0"/>
+                </a:lnTo>
+                <a:lnTo>
+                  <a:pt x="4573536" y="0"/>
+                </a:lnTo>
+                <a:lnTo>
+                  <a:pt x="4622714" y="0"/>
+                </a:lnTo>
+                <a:lnTo>
+                  <a:pt x="4671892" y="0"/>
+                </a:lnTo>
+                <a:lnTo>
+                  <a:pt x="4721070" y="0"/>
+                </a:lnTo>
+                <a:lnTo>
+                  <a:pt x="4770248" y="0"/>
+                </a:lnTo>
+                <a:lnTo>
+                  <a:pt x="4819425" y="0"/>
+                </a:lnTo>
+                <a:lnTo>
+                  <a:pt x="4868603" y="0"/>
+                </a:lnTo>
+                <a:lnTo>
+                  <a:pt x="4917781" y="0"/>
+                </a:lnTo>
+                <a:lnTo>
+                  <a:pt x="4966959" y="0"/>
+                </a:lnTo>
+                <a:lnTo>
+                  <a:pt x="5016137" y="0"/>
+                </a:lnTo>
+                <a:lnTo>
+                  <a:pt x="5065314" y="0"/>
+                </a:lnTo>
+                <a:lnTo>
+                  <a:pt x="5114492" y="0"/>
+                </a:lnTo>
+                <a:lnTo>
+                  <a:pt x="5163670" y="0"/>
+                </a:lnTo>
+                <a:lnTo>
+                  <a:pt x="5212848" y="0"/>
+                </a:lnTo>
+                <a:lnTo>
+                  <a:pt x="5262026" y="0"/>
+                </a:lnTo>
+                <a:lnTo>
+                  <a:pt x="5311204" y="0"/>
+                </a:lnTo>
+                <a:lnTo>
+                  <a:pt x="5360381" y="0"/>
+                </a:lnTo>
+                <a:lnTo>
+                  <a:pt x="5409559" y="0"/>
+                </a:lnTo>
+                <a:lnTo>
+                  <a:pt x="5458737" y="0"/>
+                </a:lnTo>
+                <a:lnTo>
+                  <a:pt x="5507915" y="0"/>
+                </a:lnTo>
+                <a:lnTo>
+                  <a:pt x="5557093" y="0"/>
+                </a:lnTo>
+                <a:lnTo>
+                  <a:pt x="5606270" y="0"/>
+                </a:lnTo>
+                <a:lnTo>
+                  <a:pt x="5655448" y="0"/>
+                </a:lnTo>
+                <a:lnTo>
+                  <a:pt x="5704626" y="0"/>
+                </a:lnTo>
+                <a:lnTo>
+                  <a:pt x="5753804" y="0"/>
+                </a:lnTo>
+                <a:lnTo>
+                  <a:pt x="5802982" y="0"/>
+                </a:lnTo>
+                <a:lnTo>
+                  <a:pt x="5852160" y="0"/>
+                </a:lnTo>
+              </a:path>
+            </a:pathLst>
+          </a:custGeom>
+          <a:noFill/>
+          <a:ln w="30480">
+            <a:solidFill>
+              <a:srgbClr val="F2B880"/>
+            </a:solidFill>
+            <a:prstDash val="dash"/>
+          </a:ln>
+          <a:effectLst/>
+        </p:spPr>
+        <p:txBody>
+          <a:bodyPr rtlCol="0" anchor="ctr"/>
+          <a:lstStyle/>
+          <a:p>
+            <a:pPr algn="ctr"/>
+          </a:p>
+        </p:txBody>
+      </p:sp>
+      <p:sp>
+        <p:nvSpPr>
+          <p:cNvPr id="50" name="C1-E02 ellipse 48" descr="sci-ppt:o048"/>
+          <p:cNvSpPr/>
+          <p:nvPr/>
+        </p:nvSpPr>
+        <p:spPr>
+          <a:xfrm>
+            <a:off x="7455407" y="4443983"/>
+            <a:ext cx="146304" cy="146304"/>
+          </a:xfrm>
+          <a:prstGeom prst="ellipse">
+            <a:avLst/>
+          </a:prstGeom>
+          <a:solidFill>
+            <a:srgbClr val="8EDBD4"/>
+          </a:solidFill>
+          <a:ln w="12700">
+            <a:solidFill>
+              <a:srgbClr val="8EDBD4"/>
+            </a:solidFill>
+          </a:ln>
+          <a:effectLst/>
+        </p:spPr>
+        <p:txBody>
+          <a:bodyPr rtlCol="0" anchor="ctr"/>
+          <a:lstStyle/>
+          <a:p>
+            <a:pPr algn="ctr"/>
+          </a:p>
+        </p:txBody>
+      </p:sp>
+      <p:sp>
+        <p:nvSpPr>
+          <p:cNvPr id="51" name="C1-E02 text 49" descr="sci-ppt:o049"/>
           <p:cNvSpPr txBox="1"/>
           <p:nvPr/>
         </p:nvSpPr>
         <p:spPr>
           <a:xfrm>
-            <a:off x="365760" y="4974336"/>
-            <a:ext cx="5547360" cy="321259"/>
+            <a:off x="7656576" y="4151375"/>
+            <a:ext cx="1645920" cy="247142"/>
           </a:xfrm>
           <a:prstGeom prst="rect">
             <a:avLst/>
@@ -3608,7 +5337,7 @@
           <a:effectLst/>
         </p:spPr>
         <p:txBody>
-          <a:bodyPr wrap="none" lIns="27432" rIns="27432" tIns="18288" bIns="18288" anchor="ctr">
+          <a:bodyPr wrap="none" lIns="18288" rIns="18288" tIns="18288" bIns="18288" anchor="t">
             <a:spAutoFit/>
           </a:bodyPr>
           <a:lstStyle/>
@@ -3619,27 +5348,163 @@
               </a:spcAft>
             </a:pPr>
             <a:r>
-              <a:rPr sz="1632" b="0" i="0">
+              <a:rPr sz="1300" b="0" i="0">
+                <a:solidFill>
+                  <a:srgbClr val="8EDBD4"/>
+                </a:solidFill>
+                <a:latin typeface="Arial"/>
+              </a:rPr>
+              <a:t>u(2R) = Ṙ/4</a:t>
+            </a:r>
+          </a:p>
+        </p:txBody>
+      </p:sp>
+      <p:sp>
+        <p:nvSpPr>
+          <p:cNvPr id="52" name="C1-E02 text 50" descr="sci-ppt:o050"/>
+          <p:cNvSpPr txBox="1"/>
+          <p:nvPr/>
+        </p:nvSpPr>
+        <p:spPr>
+          <a:xfrm>
+            <a:off x="6041136" y="1483156"/>
+            <a:ext cx="4023360" cy="239395"/>
+          </a:xfrm>
+          <a:prstGeom prst="rect">
+            <a:avLst/>
+          </a:prstGeom>
+          <a:noFill/>
+          <a:effectLst/>
+        </p:spPr>
+        <p:txBody>
+          <a:bodyPr wrap="none" lIns="18288" rIns="18288" tIns="18288" bIns="18288" anchor="t">
+            <a:spAutoFit/>
+          </a:bodyPr>
+          <a:lstStyle/>
+          <a:p>
+            <a:pPr algn="l">
+              <a:spcAft>
+                <a:spcPts val="0"/>
+              </a:spcAft>
+            </a:pPr>
+            <a:r>
+              <a:rPr sz="1250" b="0" i="0">
+                <a:solidFill>
+                  <a:srgbClr val="F2B880"/>
+                </a:solidFill>
+                <a:latin typeface="Arial"/>
+              </a:rPr>
+              <a:t>r²u / (R²Ṙ) = 1 on every shell</a:t>
+            </a:r>
+          </a:p>
+        </p:txBody>
+      </p:sp>
+      <p:sp>
+        <p:nvSpPr>
+          <p:cNvPr id="53" name="C1-E02 text 51" descr="sci-ppt:o051"/>
+          <p:cNvSpPr txBox="1"/>
+          <p:nvPr/>
+        </p:nvSpPr>
+        <p:spPr>
+          <a:xfrm>
+            <a:off x="8577072" y="3261847"/>
+            <a:ext cx="2194560" cy="247142"/>
+          </a:xfrm>
+          <a:prstGeom prst="rect">
+            <a:avLst/>
+          </a:prstGeom>
+          <a:noFill/>
+          <a:effectLst/>
+        </p:spPr>
+        <p:txBody>
+          <a:bodyPr wrap="none" lIns="18288" rIns="18288" tIns="18288" bIns="18288" anchor="t">
+            <a:spAutoFit/>
+          </a:bodyPr>
+          <a:lstStyle/>
+          <a:p>
+            <a:pPr algn="l">
+              <a:spcAft>
+                <a:spcPts val="0"/>
+              </a:spcAft>
+            </a:pPr>
+            <a:r>
+              <a:rPr sz="1300" b="0" i="0">
+                <a:solidFill>
+                  <a:srgbClr val="8EDBD4"/>
+                </a:solidFill>
+                <a:latin typeface="Arial"/>
+              </a:rPr>
+              <a:t>u / Ṙ = (R/r)²</a:t>
+            </a:r>
+          </a:p>
+        </p:txBody>
+      </p:sp>
+      <p:sp>
+        <p:nvSpPr>
+          <p:cNvPr id="54" name="C1-E02 text 52" descr="sci-ppt:o052"/>
+          <p:cNvSpPr txBox="1"/>
+          <p:nvPr/>
+        </p:nvSpPr>
+        <p:spPr>
+          <a:xfrm>
+            <a:off x="5577840" y="5897880"/>
+            <a:ext cx="5852160" cy="448563"/>
+          </a:xfrm>
+          <a:prstGeom prst="rect">
+            <a:avLst/>
+          </a:prstGeom>
+          <a:noFill/>
+          <a:effectLst/>
+        </p:spPr>
+        <p:txBody>
+          <a:bodyPr wrap="none" lIns="18288" rIns="18288" tIns="18288" bIns="18288" anchor="t">
+            <a:spAutoFit/>
+          </a:bodyPr>
+          <a:lstStyle/>
+          <a:p>
+            <a:pPr algn="l">
+              <a:spcAft>
+                <a:spcPts val="0"/>
+              </a:spcAft>
+            </a:pPr>
+            <a:r>
+              <a:rPr sz="1300" b="0" i="0">
                 <a:solidFill>
                   <a:srgbClr val="E7F0F3"/>
                 </a:solidFill>
                 <a:latin typeface="Arial"/>
               </a:rPr>
-              <a:t>r ≥ R</a:t>
-            </a:r>
-          </a:p>
-        </p:txBody>
-      </p:sp>
-      <p:sp>
-        <p:nvSpPr>
-          <p:cNvPr id="17" name="text16" descr="sci-ppt:C1-E02-016"/>
+              <a:t>From ∇·u = 0: r²u = C(t). The wall condition u(R) = Ṙ gives C =</a:t>
+            </a:r>
+          </a:p>
+          <a:p>
+            <a:pPr algn="l">
+              <a:spcAft>
+                <a:spcPts val="0"/>
+              </a:spcAft>
+            </a:pPr>
+            <a:r>
+              <a:rPr sz="1300" b="0" i="0">
+                <a:solidFill>
+                  <a:srgbClr val="E7F0F3"/>
+                </a:solidFill>
+                <a:latin typeface="Arial"/>
+              </a:rPr>
+              <a:t>R²Ṙ.</a:t>
+            </a:r>
+          </a:p>
+        </p:txBody>
+      </p:sp>
+      <p:sp>
+        <p:nvSpPr>
+          <p:cNvPr id="55" name="C1-E02 text 53" descr="sci-ppt:o053"/>
           <p:cNvSpPr txBox="1"/>
           <p:nvPr/>
         </p:nvSpPr>
         <p:spPr>
           <a:xfrm>
-            <a:off x="365760" y="5266944"/>
-            <a:ext cx="5547360" cy="321259"/>
+            <a:off x="320040" y="6510528"/>
+            <a:ext cx="11521440" cy="200660"/>
           </a:xfrm>
           <a:prstGeom prst="rect">
             <a:avLst/>
@@ -3648,7 +5513,7 @@
           <a:effectLst/>
         </p:spPr>
         <p:txBody>
-          <a:bodyPr wrap="none" lIns="27432" rIns="27432" tIns="18288" bIns="18288" anchor="ctr">
+          <a:bodyPr wrap="none" lIns="18288" rIns="18288" tIns="18288" bIns="18288" anchor="t">
             <a:spAutoFit/>
           </a:bodyPr>
           <a:lstStyle/>
@@ -3659,253 +5524,13 @@
               </a:spcAft>
             </a:pPr>
             <a:r>
-              <a:rPr sz="1632" b="0" i="0">
-                <a:solidFill>
-                  <a:srgbClr val="E7F0F3"/>
-                </a:solidFill>
-                <a:latin typeface="Arial"/>
-              </a:rPr>
-              <a:t>Ṙ</a:t>
-            </a:r>
-          </a:p>
-        </p:txBody>
-      </p:sp>
-      <p:sp>
-        <p:nvSpPr>
-          <p:cNvPr id="18" name="text17" descr="sci-ppt:C1-E02-017"/>
-          <p:cNvSpPr txBox="1"/>
-          <p:nvPr/>
-        </p:nvSpPr>
-        <p:spPr>
-          <a:xfrm>
-            <a:off x="365760" y="5559552"/>
-            <a:ext cx="5547360" cy="321259"/>
-          </a:xfrm>
-          <a:prstGeom prst="rect">
-            <a:avLst/>
-          </a:prstGeom>
-          <a:noFill/>
-          <a:effectLst/>
-        </p:spPr>
-        <p:txBody>
-          <a:bodyPr wrap="none" lIns="27432" rIns="27432" tIns="18288" bIns="18288" anchor="ctr">
-            <a:spAutoFit/>
-          </a:bodyPr>
-          <a:lstStyle/>
-          <a:p>
-            <a:pPr algn="l">
-              <a:spcAft>
-                <a:spcPts val="0"/>
-              </a:spcAft>
-            </a:pPr>
-            <a:r>
-              <a:rPr sz="1632" b="0" i="0">
-                <a:solidFill>
-                  <a:srgbClr val="E7F0F3"/>
-                </a:solidFill>
-                <a:latin typeface="Arial"/>
-              </a:rPr>
-              <a:t>t</a:t>
-            </a:r>
-          </a:p>
-        </p:txBody>
-      </p:sp>
-      <p:sp>
-        <p:nvSpPr>
-          <p:cNvPr id="19" name="text18" descr="sci-ppt:C1-E02-018"/>
-          <p:cNvSpPr txBox="1"/>
-          <p:nvPr/>
-        </p:nvSpPr>
-        <p:spPr>
-          <a:xfrm>
-            <a:off x="6156960" y="4974336"/>
-            <a:ext cx="5547360" cy="321259"/>
-          </a:xfrm>
-          <a:prstGeom prst="rect">
-            <a:avLst/>
-          </a:prstGeom>
-          <a:noFill/>
-          <a:effectLst/>
-        </p:spPr>
-        <p:txBody>
-          <a:bodyPr wrap="none" lIns="27432" rIns="27432" tIns="18288" bIns="18288" anchor="ctr">
-            <a:spAutoFit/>
-          </a:bodyPr>
-          <a:lstStyle/>
-          <a:p>
-            <a:pPr algn="l">
-              <a:spcAft>
-                <a:spcPts val="0"/>
-              </a:spcAft>
-            </a:pPr>
-            <a:r>
-              <a:rPr sz="1632" b="0" i="0">
-                <a:solidFill>
-                  <a:srgbClr val="E7F0F3"/>
-                </a:solidFill>
-                <a:latin typeface="Arial"/>
-              </a:rPr>
-              <a:t>u(r,t)</a:t>
-            </a:r>
-          </a:p>
-        </p:txBody>
-      </p:sp>
-      <p:sp>
-        <p:nvSpPr>
-          <p:cNvPr id="20" name="text19" descr="sci-ppt:C1-E02-019"/>
-          <p:cNvSpPr txBox="1"/>
-          <p:nvPr/>
-        </p:nvSpPr>
-        <p:spPr>
-          <a:xfrm>
-            <a:off x="6156960" y="5266944"/>
-            <a:ext cx="5547360" cy="321259"/>
-          </a:xfrm>
-          <a:prstGeom prst="rect">
-            <a:avLst/>
-          </a:prstGeom>
-          <a:noFill/>
-          <a:effectLst/>
-        </p:spPr>
-        <p:txBody>
-          <a:bodyPr wrap="none" lIns="27432" rIns="27432" tIns="18288" bIns="18288" anchor="ctr">
-            <a:spAutoFit/>
-          </a:bodyPr>
-          <a:lstStyle/>
-          <a:p>
-            <a:pPr algn="l">
-              <a:spcAft>
-                <a:spcPts val="0"/>
-              </a:spcAft>
-            </a:pPr>
-            <a:r>
-              <a:rPr sz="1632" b="0" i="0">
-                <a:solidFill>
-                  <a:srgbClr val="E7F0F3"/>
-                </a:solidFill>
-                <a:latin typeface="Arial"/>
-              </a:rPr>
-              <a:t>C(t) = R²Ṙ</a:t>
-            </a:r>
-          </a:p>
-        </p:txBody>
-      </p:sp>
-      <p:sp>
-        <p:nvSpPr>
-          <p:cNvPr id="21" name="text20" descr="sci-ppt:C1-E02-020"/>
-          <p:cNvSpPr txBox="1"/>
-          <p:nvPr/>
-        </p:nvSpPr>
-        <p:spPr>
-          <a:xfrm>
-            <a:off x="6156960" y="5559552"/>
-            <a:ext cx="5547360" cy="321259"/>
-          </a:xfrm>
-          <a:prstGeom prst="rect">
-            <a:avLst/>
-          </a:prstGeom>
-          <a:noFill/>
-          <a:effectLst/>
-        </p:spPr>
-        <p:txBody>
-          <a:bodyPr wrap="none" lIns="27432" rIns="27432" tIns="18288" bIns="18288" anchor="ctr">
-            <a:spAutoFit/>
-          </a:bodyPr>
-          <a:lstStyle/>
-          <a:p>
-            <a:pPr algn="l">
-              <a:spcAft>
-                <a:spcPts val="0"/>
-              </a:spcAft>
-            </a:pPr>
-            <a:r>
-              <a:rPr sz="1632" b="0" i="0">
-                <a:solidFill>
-                  <a:srgbClr val="E7F0F3"/>
-                </a:solidFill>
-                <a:latin typeface="Arial"/>
-              </a:rPr>
-              <a:t>r²u = constant</a:t>
-            </a:r>
-          </a:p>
-        </p:txBody>
-      </p:sp>
-      <p:sp>
-        <p:nvSpPr>
-          <p:cNvPr id="22" name="text21" descr="sci-ppt:C1-E02-021"/>
-          <p:cNvSpPr txBox="1"/>
-          <p:nvPr/>
-        </p:nvSpPr>
-        <p:spPr>
-          <a:xfrm>
-            <a:off x="365760" y="6278880"/>
-            <a:ext cx="11277600" cy="302361"/>
-          </a:xfrm>
-          <a:prstGeom prst="rect">
-            <a:avLst/>
-          </a:prstGeom>
-          <a:noFill/>
-          <a:effectLst/>
-        </p:spPr>
-        <p:txBody>
-          <a:bodyPr wrap="none" lIns="27432" rIns="27432" tIns="18288" bIns="18288" anchor="ctr">
-            <a:spAutoFit/>
-          </a:bodyPr>
-          <a:lstStyle/>
-          <a:p>
-            <a:pPr algn="l">
-              <a:spcAft>
-                <a:spcPts val="0"/>
-              </a:spcAft>
-            </a:pPr>
-            <a:r>
-              <a:rPr sz="1536" b="0" i="0">
+              <a:rPr sz="1000" b="0" i="0">
                 <a:solidFill>
                   <a:srgbClr val="B4C7D2"/>
                 </a:solidFill>
                 <a:latin typeface="Arial"/>
               </a:rPr>
-              <a:t>Concentric surfaces carry the same volume flux</a:t>
-            </a:r>
-          </a:p>
-        </p:txBody>
-      </p:sp>
-      <p:sp>
-        <p:nvSpPr>
-          <p:cNvPr id="23" name="text22" descr="sci-ppt:C1-E02-022"/>
-          <p:cNvSpPr txBox="1"/>
-          <p:nvPr/>
-        </p:nvSpPr>
-        <p:spPr>
-          <a:xfrm>
-            <a:off x="365760" y="6571488"/>
-            <a:ext cx="11277600" cy="302361"/>
-          </a:xfrm>
-          <a:prstGeom prst="rect">
-            <a:avLst/>
-          </a:prstGeom>
-          <a:noFill/>
-          <a:effectLst/>
-        </p:spPr>
-        <p:txBody>
-          <a:bodyPr wrap="none" lIns="27432" rIns="27432" tIns="18288" bIns="18288" anchor="ctr">
-            <a:spAutoFit/>
-          </a:bodyPr>
-          <a:lstStyle/>
-          <a:p>
-            <a:pPr algn="l">
-              <a:spcAft>
-                <a:spcPts val="0"/>
-              </a:spcAft>
-            </a:pPr>
-            <a:r>
-              <a:rPr sz="1536" b="0" i="0">
-                <a:solidFill>
-                  <a:srgbClr val="B4C7D2"/>
-                </a:solidFill>
-                <a:latin typeface="Arial"/>
-              </a:rPr>
-              <a:t>At r = 2R the speed is Ṙ/4</a:t>
+              <a:t>Curves from u = R²Ṙ/r² (Eq. C1-E02).</a:t>
             </a:r>
           </a:p>
         </p:txBody>
